--- a/baseline/optimiser/optimisation_architecture_exec_pack_software_architecture_baseline_telstra_15slides.pptx
+++ b/baseline/optimiser/optimisation_architecture_exec_pack_software_architecture_baseline_telstra_15slides.pptx
@@ -13227,11 +13227,11 @@
           <a:p>
             <a:r>
               <a:rPr dirty="0"/>
-              <a:t>Key point: Controller MS is the runtime source of truth; it validates requests against ACTIVE Definition contracts. Worker MS emits facts</a:t>
+              <a:t>Key point: Controller MS is the runtime source of truth; it validates requests against ACTIVE Definition contracts. Worker MS emits </a:t>
             </a:r>
             <a:r>
               <a:rPr lang="en-AU" dirty="0"/>
-              <a:t>, state of that model execution, Definition MS gives us the source of truth reference of capability model</a:t>
+              <a:t>results, state of that model execution, Definition MS gives us the source of truth reference of capability model</a:t>
             </a:r>
             <a:r>
               <a:rPr dirty="0"/>
@@ -16479,12 +16479,20 @@
               <a:buNone/>
             </a:pPr>
             <a:r>
+              <a:rPr lang="en-US" sz="980" dirty="0" err="1">
+                <a:solidFill>
+                  <a:srgbClr val="5F6B7A"/>
+                </a:solidFill>
+              </a:rPr>
+              <a:t>Identity+user</a:t>
+            </a:r>
+            <a:r>
               <a:rPr lang="en-US" sz="980" dirty="0">
                 <a:solidFill>
                   <a:srgbClr val="5F6B7A"/>
                 </a:solidFill>
               </a:rPr>
-              <a:t>identity</a:t>
+              <a:t> context</a:t>
             </a:r>
             <a:endParaRPr lang="en-US" sz="980" dirty="0"/>
           </a:p>

--- a/baseline/optimiser/optimisation_architecture_exec_pack_software_architecture_baseline_telstra_15slides.pptx
+++ b/baseline/optimiser/optimisation_architecture_exec_pack_software_architecture_baseline_telstra_15slides.pptx
@@ -2488,6 +2488,15 @@
               <a:defRPr sz="1800" b="0"/>
             </a:pPr>
             <a:r>
+              <a:rPr lang="en-AU" sz="1200" b="1" dirty="0">
+                <a:solidFill>
+                  <a:srgbClr val="0D54FF"/>
+                </a:solidFill>
+                <a:latin typeface="Aptos" pitchFamily="34" charset="0"/>
+              </a:rPr>
+              <a:t>CODE </a:t>
+            </a:r>
+            <a:r>
               <a:rPr sz="1200" b="1" dirty="0">
                 <a:solidFill>
                   <a:srgbClr val="0D54FF"/>
@@ -2560,7 +2569,7 @@
         <p:spPr>
           <a:xfrm>
             <a:off x="502920" y="1261872"/>
-            <a:ext cx="10241280" cy="685800"/>
+            <a:ext cx="10241280" cy="453650"/>
           </a:xfrm>
           <a:prstGeom prst="rect">
             <a:avLst/>
@@ -2581,7 +2590,23 @@
             </a:pPr>
             <a:r>
               <a:rPr sz="1300" b="0" dirty="0"/>
-              <a:t>Infrastructure is defined as code and promoted through governed delivery. Kubernetes telemetry and dashboards support elastic scaling in public and hybrid cloud environments.</a:t>
+              <a:t>Infrastructure is defined as code and promoted through governed delivery. Kubernetes </a:t>
+            </a:r>
+            <a:r>
+              <a:rPr lang="en-AU" sz="1300" b="0" dirty="0"/>
+              <a:t>, Prometheus </a:t>
+            </a:r>
+            <a:r>
+              <a:rPr sz="1300" b="0" dirty="0"/>
+              <a:t>telemetry</a:t>
+            </a:r>
+            <a:r>
+              <a:rPr lang="en-AU" sz="1300" b="0" dirty="0"/>
+              <a:t>, Application monitoring</a:t>
+            </a:r>
+            <a:r>
+              <a:rPr sz="1300" b="0" dirty="0"/>
+              <a:t> and dashboards support elastic scaling in public and hybrid cloud environments.</a:t>
             </a:r>
           </a:p>
         </p:txBody>
@@ -3781,7 +3806,7 @@
         <p:spPr>
           <a:xfrm>
             <a:off x="2084831" y="5010912"/>
-            <a:ext cx="9006840" cy="402336"/>
+            <a:ext cx="9006840" cy="529569"/>
           </a:xfrm>
           <a:prstGeom prst="rect">
             <a:avLst/>
@@ -3801,9 +3826,25 @@
               <a:defRPr sz="1050" b="0"/>
             </a:pPr>
             <a:r>
-              <a:rPr sz="1050" b="0"/>
-              <a:t>Infrastructure is re-created from code rather than hand-managed. GitHub Copilot, Claude Code and Codex can assist delivery, but changes still flow through pull requests, quality gates, security scanning, GitOps promotion and controlled release governance.</a:t>
-            </a:r>
+              <a:rPr sz="1050" b="0" dirty="0"/>
+              <a:t>Infrastructure is re-created from code rather than hand-managed. GitHub Copilot, Claude Code and Codex can assist delivery, but changes still flow through pull requests, quality gates, security scanning, </a:t>
+            </a:r>
+            <a:r>
+              <a:rPr sz="1050" b="0" dirty="0" err="1"/>
+              <a:t>GitOps</a:t>
+            </a:r>
+            <a:r>
+              <a:rPr sz="1050" b="0" dirty="0"/>
+              <a:t> promotion and controlled release governance.</a:t>
+            </a:r>
+            <a:br>
+              <a:rPr lang="en-AU" sz="1050" b="0" dirty="0"/>
+            </a:br>
+            <a:r>
+              <a:rPr lang="en-AU" sz="1050" b="0" dirty="0"/>
+              <a:t>CI/CD will run consistently to make sure nothing unexpected broken at day-to-day operations.</a:t>
+            </a:r>
+            <a:endParaRPr sz="1050" b="0" dirty="0"/>
           </a:p>
         </p:txBody>
       </p:sp>
@@ -4288,13 +4329,31 @@
           <a:p>
             <a:pPr algn="l"/>
             <a:r>
-              <a:rPr sz="2500" b="1">
+              <a:rPr sz="2500" b="1" dirty="0">
                 <a:solidFill>
                   <a:srgbClr val="131A35"/>
                 </a:solidFill>
                 <a:latin typeface="Arial"/>
               </a:rPr>
-              <a:t>Standing up a new reusable optimisation asset</a:t>
+              <a:t>Standing up a new reusable </a:t>
+            </a:r>
+            <a:r>
+              <a:rPr sz="2500" b="1" dirty="0" err="1">
+                <a:solidFill>
+                  <a:srgbClr val="131A35"/>
+                </a:solidFill>
+                <a:latin typeface="Arial"/>
+              </a:rPr>
+              <a:t>optimisation</a:t>
+            </a:r>
+            <a:r>
+              <a:rPr sz="2500" b="1" dirty="0">
+                <a:solidFill>
+                  <a:srgbClr val="131A35"/>
+                </a:solidFill>
+                <a:latin typeface="Arial"/>
+              </a:rPr>
+              <a:t> asset</a:t>
             </a:r>
           </a:p>
         </p:txBody>
@@ -4508,7 +4567,7 @@
         <p:spPr>
           <a:xfrm>
             <a:off x="576072" y="3086886"/>
-            <a:ext cx="1335024" cy="1828800"/>
+            <a:ext cx="1335024" cy="858697"/>
           </a:xfrm>
           <a:prstGeom prst="rect">
             <a:avLst/>
@@ -4523,6 +4582,15 @@
           <a:p>
             <a:pPr algn="l"/>
             <a:r>
+              <a:rPr lang="en-AU" sz="910" b="0" dirty="0">
+                <a:solidFill>
+                  <a:srgbClr val="5F6B7A"/>
+                </a:solidFill>
+                <a:latin typeface="Arial"/>
+              </a:rPr>
+              <a:t>Git </a:t>
+            </a:r>
+            <a:r>
               <a:rPr sz="910" b="0" dirty="0">
                 <a:solidFill>
                   <a:srgbClr val="5F6B7A"/>
@@ -4547,7 +4615,52 @@
                 </a:solidFill>
                 <a:latin typeface="Arial"/>
               </a:rPr>
-              <a:t>, Kubernetes runtime, Vault, PostgreSQL, Kafka, Redis and observability.</a:t>
+              <a:t>, Kubernetes runtime,</a:t>
+            </a:r>
+            <a:r>
+              <a:rPr lang="en-AU" sz="910" b="0" dirty="0">
+                <a:solidFill>
+                  <a:srgbClr val="5F6B7A"/>
+                </a:solidFill>
+                <a:latin typeface="Arial"/>
+              </a:rPr>
+              <a:t>Helm charts,</a:t>
+            </a:r>
+            <a:r>
+              <a:rPr sz="910" b="0" dirty="0">
+                <a:solidFill>
+                  <a:srgbClr val="5F6B7A"/>
+                </a:solidFill>
+                <a:latin typeface="Arial"/>
+              </a:rPr>
+              <a:t> Vault, PostgreSQL, Kafka, Redis and </a:t>
+            </a:r>
+            <a:r>
+              <a:rPr lang="en-AU" sz="910" b="0" dirty="0">
+                <a:solidFill>
+                  <a:srgbClr val="5F6B7A"/>
+                </a:solidFill>
+                <a:latin typeface="Arial"/>
+              </a:rPr>
+              <a:t>O</a:t>
+            </a:r>
+            <a:r>
+              <a:rPr sz="910" b="0" dirty="0" err="1">
+                <a:solidFill>
+                  <a:srgbClr val="5F6B7A"/>
+                </a:solidFill>
+                <a:latin typeface="Arial"/>
+              </a:rPr>
+              <a:t>bservability</a:t>
+            </a:r>
+            <a:r>
+              <a:rPr sz="910" b="0" dirty="0">
+                <a:solidFill>
+                  <a:srgbClr val="5F6B7A"/>
+                </a:solidFill>
+                <a:latin typeface="Arial"/>
+              </a:rPr>
+              <a:t>.</a:t>
             </a:r>
           </a:p>
         </p:txBody>
@@ -6014,8 +6127,8 @@
         </p:nvSpPr>
         <p:spPr>
           <a:xfrm>
-            <a:off x="594360" y="1980672"/>
-            <a:ext cx="3703320" cy="817809"/>
+            <a:off x="594359" y="1980672"/>
+            <a:ext cx="5396537" cy="817809"/>
           </a:xfrm>
           <a:prstGeom prst="roundRect">
             <a:avLst/>
@@ -6168,7 +6281,7 @@
         <p:spPr>
           <a:xfrm>
             <a:off x="731520" y="2483593"/>
-            <a:ext cx="3429000" cy="64008"/>
+            <a:ext cx="4965086" cy="158505"/>
           </a:xfrm>
           <a:prstGeom prst="rect">
             <a:avLst/>
@@ -6183,7 +6296,7 @@
           <a:p>
             <a:pPr algn="l"/>
             <a:r>
-              <a:rPr sz="910" b="0">
+              <a:rPr sz="910" b="0" dirty="0">
                 <a:solidFill>
                   <a:srgbClr val="5F6B7A"/>
                 </a:solidFill>
@@ -6209,7 +6322,7 @@
         <p:spPr>
           <a:xfrm>
             <a:off x="594360" y="2999649"/>
-            <a:ext cx="3703320" cy="800679"/>
+            <a:ext cx="5396536" cy="800679"/>
           </a:xfrm>
           <a:prstGeom prst="roundRect">
             <a:avLst/>
@@ -6361,8 +6474,8 @@
         </p:nvSpPr>
         <p:spPr>
           <a:xfrm>
-            <a:off x="731520" y="3502570"/>
-            <a:ext cx="3429000" cy="64008"/>
+            <a:off x="731519" y="3502569"/>
+            <a:ext cx="4859983" cy="158505"/>
           </a:xfrm>
           <a:prstGeom prst="rect">
             <a:avLst/>
@@ -6421,7 +6534,7 @@
         <p:spPr>
           <a:xfrm>
             <a:off x="594360" y="3976587"/>
-            <a:ext cx="3703320" cy="658368"/>
+            <a:ext cx="5396536" cy="658368"/>
           </a:xfrm>
           <a:prstGeom prst="roundRect">
             <a:avLst/>
@@ -6573,8 +6686,8 @@
         </p:nvSpPr>
         <p:spPr>
           <a:xfrm>
-            <a:off x="731520" y="4332362"/>
-            <a:ext cx="3429000" cy="64008"/>
+            <a:off x="731520" y="4426955"/>
+            <a:ext cx="5112232" cy="158505"/>
           </a:xfrm>
           <a:prstGeom prst="rect">
             <a:avLst/>
@@ -6633,7 +6746,7 @@
         <p:spPr>
           <a:xfrm>
             <a:off x="594360" y="4774848"/>
-            <a:ext cx="3703320" cy="658368"/>
+            <a:ext cx="5396536" cy="658368"/>
           </a:xfrm>
           <a:prstGeom prst="roundRect">
             <a:avLst/>
@@ -6785,8 +6898,8 @@
         </p:nvSpPr>
         <p:spPr>
           <a:xfrm>
-            <a:off x="742030" y="5141138"/>
-            <a:ext cx="3429000" cy="64008"/>
+            <a:off x="742029" y="5214707"/>
+            <a:ext cx="4954577" cy="158505"/>
           </a:xfrm>
           <a:prstGeom prst="rect">
             <a:avLst/>
@@ -6801,7 +6914,7 @@
           <a:p>
             <a:pPr algn="l"/>
             <a:r>
-              <a:rPr sz="910" b="0">
+              <a:rPr sz="910" b="0" dirty="0">
                 <a:solidFill>
                   <a:srgbClr val="5F6B7A"/>
                 </a:solidFill>
@@ -6826,7 +6939,7 @@
         </p:nvSpPr>
         <p:spPr>
           <a:xfrm>
-            <a:off x="4908856" y="2064760"/>
+            <a:off x="6832245" y="1896596"/>
             <a:ext cx="3794760" cy="2971800"/>
           </a:xfrm>
           <a:prstGeom prst="roundRect">
@@ -6878,7 +6991,7 @@
         </p:nvSpPr>
         <p:spPr>
           <a:xfrm>
-            <a:off x="4956048" y="2190985"/>
+            <a:off x="7331380" y="2190985"/>
             <a:ext cx="3246120" cy="310896"/>
           </a:xfrm>
           <a:prstGeom prst="rect">
@@ -6919,7 +7032,7 @@
         </p:nvSpPr>
         <p:spPr>
           <a:xfrm>
-            <a:off x="5010912" y="2648185"/>
+            <a:off x="7386244" y="2648185"/>
             <a:ext cx="3246120" cy="228600"/>
           </a:xfrm>
           <a:prstGeom prst="rect">
@@ -6960,7 +7073,7 @@
         </p:nvSpPr>
         <p:spPr>
           <a:xfrm>
-            <a:off x="5010912" y="3032233"/>
+            <a:off x="7386244" y="3032233"/>
             <a:ext cx="3246120" cy="228600"/>
           </a:xfrm>
           <a:prstGeom prst="rect">
@@ -7001,7 +7114,7 @@
         </p:nvSpPr>
         <p:spPr>
           <a:xfrm>
-            <a:off x="5010912" y="3416281"/>
+            <a:off x="7386244" y="3416281"/>
             <a:ext cx="3246120" cy="228600"/>
           </a:xfrm>
           <a:prstGeom prst="rect">
@@ -7042,7 +7155,7 @@
         </p:nvSpPr>
         <p:spPr>
           <a:xfrm>
-            <a:off x="5010912" y="3800329"/>
+            <a:off x="7386244" y="3800329"/>
             <a:ext cx="3246120" cy="228600"/>
           </a:xfrm>
           <a:prstGeom prst="rect">
@@ -7083,7 +7196,7 @@
         </p:nvSpPr>
         <p:spPr>
           <a:xfrm>
-            <a:off x="5010912" y="4184377"/>
+            <a:off x="7386244" y="4184377"/>
             <a:ext cx="3246120" cy="228600"/>
           </a:xfrm>
           <a:prstGeom prst="rect">
@@ -7555,7 +7668,7 @@
           <a:p>
             <a:pPr algn="l"/>
             <a:r>
-              <a:rPr sz="1100" b="1">
+              <a:rPr sz="1100" b="1" dirty="0">
                 <a:solidFill>
                   <a:srgbClr val="0D54FF"/>
                 </a:solidFill>
@@ -8010,7 +8123,7 @@
         <p:spPr>
           <a:xfrm>
             <a:off x="4677629" y="2353077"/>
-            <a:ext cx="3383280" cy="332509"/>
+            <a:ext cx="3383280" cy="298543"/>
           </a:xfrm>
           <a:prstGeom prst="rect">
             <a:avLst/>
@@ -8025,13 +8138,22 @@
           <a:p>
             <a:pPr algn="l"/>
             <a:r>
-              <a:rPr sz="910" b="0">
+              <a:rPr lang="en-AU" sz="910" b="0" dirty="0">
                 <a:solidFill>
                   <a:srgbClr val="5F6B7A"/>
                 </a:solidFill>
                 <a:latin typeface="Arial"/>
               </a:rPr>
-              <a:t>Operations owns health, dashboards, alerts, DLQ, capacity and incident response.</a:t>
+              <a:t>Platform team</a:t>
+            </a:r>
+            <a:r>
+              <a:rPr sz="910" b="0" dirty="0">
+                <a:solidFill>
+                  <a:srgbClr val="5F6B7A"/>
+                </a:solidFill>
+                <a:latin typeface="Arial"/>
+              </a:rPr>
+              <a:t> owns health, dashboards, alerts, DLQ, capacity and incident response.</a:t>
             </a:r>
           </a:p>
         </p:txBody>
@@ -8219,13 +8341,31 @@
           <a:p>
             <a:pPr algn="l"/>
             <a:r>
-              <a:rPr sz="910" b="0">
+              <a:rPr sz="910" b="0" dirty="0">
                 <a:solidFill>
                   <a:srgbClr val="5F6B7A"/>
                 </a:solidFill>
                 <a:latin typeface="Arial"/>
               </a:rPr>
-              <a:t>Vault, mTLS, service identity, callback security, audit and vulnerability management.</a:t>
+              <a:t>Vault, </a:t>
+            </a:r>
+            <a:r>
+              <a:rPr sz="910" b="0" dirty="0" err="1">
+                <a:solidFill>
+                  <a:srgbClr val="5F6B7A"/>
+                </a:solidFill>
+                <a:latin typeface="Arial"/>
+              </a:rPr>
+              <a:t>mTLS</a:t>
+            </a:r>
+            <a:r>
+              <a:rPr sz="910" b="0" dirty="0">
+                <a:solidFill>
+                  <a:srgbClr val="5F6B7A"/>
+                </a:solidFill>
+                <a:latin typeface="Arial"/>
+              </a:rPr>
+              <a:t>, service identity, callback security, audit and vulnerability management.</a:t>
             </a:r>
           </a:p>
         </p:txBody>
@@ -8621,7 +8761,7 @@
               <a:buNone/>
             </a:pPr>
             <a:r>
-              <a:rPr lang="en-US" sz="850" b="1" dirty="0">
+              <a:rPr lang="en-US" sz="1200" b="1" dirty="0">
                 <a:solidFill>
                   <a:srgbClr val="16C7E8"/>
                 </a:solidFill>
@@ -8629,9 +8769,31 @@
                 <a:ea typeface="Aptos" pitchFamily="34" charset="-122"/>
                 <a:cs typeface="Aptos" pitchFamily="34" charset="-120"/>
               </a:rPr>
-              <a:t>DECISION PATH</a:t>
-            </a:r>
-            <a:endParaRPr lang="en-US" sz="850" dirty="0"/>
+              <a:t>DECISION</a:t>
+            </a:r>
+            <a:r>
+              <a:rPr lang="en-US" sz="850" b="1" dirty="0">
+                <a:solidFill>
+                  <a:srgbClr val="16C7E8"/>
+                </a:solidFill>
+                <a:latin typeface="Aptos" pitchFamily="34" charset="0"/>
+                <a:ea typeface="Aptos" pitchFamily="34" charset="-122"/>
+                <a:cs typeface="Aptos" pitchFamily="34" charset="-120"/>
+              </a:rPr>
+              <a:t> </a:t>
+            </a:r>
+            <a:r>
+              <a:rPr lang="en-US" sz="1200" b="1" dirty="0">
+                <a:solidFill>
+                  <a:srgbClr val="16C7E8"/>
+                </a:solidFill>
+                <a:latin typeface="Aptos" pitchFamily="34" charset="0"/>
+                <a:ea typeface="Aptos" pitchFamily="34" charset="-122"/>
+                <a:cs typeface="Aptos" pitchFamily="34" charset="-120"/>
+              </a:rPr>
+              <a:t>PATH</a:t>
+            </a:r>
+            <a:endParaRPr lang="en-US" sz="1200" dirty="0"/>
           </a:p>
         </p:txBody>
       </p:sp>
@@ -17010,7 +17172,7 @@
                 <a:ea typeface="Aptos Display" pitchFamily="34" charset="-122"/>
                 <a:cs typeface="Aptos Display" pitchFamily="34" charset="-120"/>
               </a:rPr>
-              <a:t>Persistence and cache strategy</a:t>
+              <a:t>Persistence and caching strategy</a:t>
             </a:r>
             <a:endParaRPr lang="en-US" sz="2400" dirty="0"/>
           </a:p>
@@ -17101,7 +17263,15 @@
           <a:p>
             <a:r>
               <a:rPr dirty="0"/>
-              <a:t>PostgreSQL is authoritative. </a:t>
+              <a:t>PostgreSQL is authoritative</a:t>
+            </a:r>
+            <a:r>
+              <a:rPr lang="en-AU" dirty="0"/>
+              <a:t> datastore</a:t>
+            </a:r>
+            <a:r>
+              <a:rPr dirty="0"/>
+              <a:t>. </a:t>
             </a:r>
             <a:r>
               <a:rPr lang="en-AU" dirty="0"/>
@@ -17109,8 +17279,13 @@
             </a:r>
             <a:r>
               <a:rPr dirty="0"/>
-              <a:t>Cache is safe read acceleration only and never replaces lifecycle, audit or validation.</a:t>
-            </a:r>
+              <a:t>Cache is safe read acceleration only and never replaces lifecycle, audit or validation</a:t>
+            </a:r>
+            <a:r>
+              <a:rPr lang="en-AU" dirty="0"/>
+              <a:t>, or treated as source of truth.</a:t>
+            </a:r>
+            <a:endParaRPr dirty="0"/>
           </a:p>
         </p:txBody>
       </p:sp>
@@ -17241,7 +17416,7 @@
                 <a:ea typeface="Aptos" pitchFamily="34" charset="-122"/>
                 <a:cs typeface="Aptos" pitchFamily="34" charset="-120"/>
               </a:rPr>
-              <a:t>specs, runtime, outbox and inbox, subscriptions, audit</a:t>
+              <a:t>specs, runtime, outbox and inbox, subscriptions, audit, encrypted at rest.</a:t>
             </a:r>
             <a:endParaRPr lang="en-US" sz="900" dirty="0"/>
           </a:p>
@@ -20415,7 +20590,7 @@
         <p:spPr>
           <a:xfrm>
             <a:off x="534093" y="1253556"/>
-            <a:ext cx="9784080" cy="274320"/>
+            <a:ext cx="9784080" cy="221599"/>
           </a:xfrm>
           <a:prstGeom prst="rect">
             <a:avLst/>
@@ -20430,13 +20605,49 @@
           <a:p>
             <a:pPr algn="l"/>
             <a:r>
-              <a:rPr sz="1200" b="0">
+              <a:rPr sz="1200" b="0" dirty="0">
                 <a:solidFill>
                   <a:srgbClr val="677384"/>
                 </a:solidFill>
                 <a:latin typeface="Arial"/>
               </a:rPr>
-              <a:t>Worker events execute work. Controller projection remains the source of truth. Webhooks only notify subscribers.</a:t>
+              <a:t>Worker events execute </a:t>
+            </a:r>
+            <a:r>
+              <a:rPr lang="en-AU" sz="1200" b="0" dirty="0">
+                <a:solidFill>
+                  <a:srgbClr val="677384"/>
+                </a:solidFill>
+                <a:latin typeface="Arial"/>
+              </a:rPr>
+              <a:t>, cancel </a:t>
+            </a:r>
+            <a:r>
+              <a:rPr sz="1200" b="0" dirty="0">
+                <a:solidFill>
+                  <a:srgbClr val="677384"/>
+                </a:solidFill>
+                <a:latin typeface="Arial"/>
+              </a:rPr>
+              <a:t>work. Controller projection remains the source of truth. Webhooks only notify subscribers</a:t>
+            </a:r>
+            <a:r>
+              <a:rPr lang="en-AU" sz="1200" b="0" dirty="0">
+                <a:solidFill>
+                  <a:srgbClr val="677384"/>
+                </a:solidFill>
+                <a:latin typeface="Arial"/>
+              </a:rPr>
+              <a:t> for status changes</a:t>
+            </a:r>
+            <a:r>
+              <a:rPr sz="1200" b="0" dirty="0">
+                <a:solidFill>
+                  <a:srgbClr val="677384"/>
+                </a:solidFill>
+                <a:latin typeface="Arial"/>
+              </a:rPr>
+              <a:t>.</a:t>
             </a:r>
           </a:p>
         </p:txBody>
@@ -22036,7 +22247,7 @@
         <p:spPr>
           <a:xfrm>
             <a:off x="3703320" y="1737360"/>
-            <a:ext cx="7040880" cy="274320"/>
+            <a:ext cx="7040880" cy="396240"/>
           </a:xfrm>
           <a:prstGeom prst="rect">
             <a:avLst/>
@@ -22046,7 +22257,7 @@
         </p:spPr>
         <p:txBody>
           <a:bodyPr wrap="square" lIns="0" tIns="0" rIns="0" bIns="0" rtlCol="0" anchor="ctr">
-            <a:normAutofit/>
+            <a:normAutofit lnSpcReduction="10000"/>
           </a:bodyPr>
           <a:lstStyle/>
           <a:p>
@@ -22059,7 +22270,7 @@
                   <a:srgbClr val="5F6B7A"/>
                 </a:solidFill>
               </a:rPr>
-              <a:t>Runtime state and outbox are durable before execution continues.</a:t>
+              <a:t>Runtime state and outbox are durable before execution continues, Inbox let us replay topics without fear of duplication.</a:t>
             </a:r>
             <a:endParaRPr lang="en-US" sz="1400" dirty="0"/>
           </a:p>

--- a/baseline/optimiser/optimisation_architecture_exec_pack_software_architecture_baseline_telstra_15slides.pptx
+++ b/baseline/optimiser/optimisation_architecture_exec_pack_software_architecture_baseline_telstra_15slides.pptx
@@ -2569,7 +2569,735 @@
         <p:spPr>
           <a:xfrm>
             <a:off x="502920" y="1261872"/>
-            <a:ext cx="10241280" cy="453650"/>
+            <a:ext cx="10241280" cy="369332"/>
+          </a:xfrm>
+          <a:prstGeom prst="rect">
+            <a:avLst/>
+          </a:prstGeom>
+          <a:noFill/>
+        </p:spPr>
+        <p:txBody>
+          <a:bodyPr wrap="square">
+            <a:spAutoFit/>
+          </a:bodyPr>
+          <a:lstStyle/>
+          <a:p>
+            <a:r>
+              <a:rPr sz="900" dirty="0"/>
+              <a:t>Infrastructure is defined as code and promoted through governed delivery. Kubernetes, Prometheus telemetry, application monitoring and dashboards support elastic scaling in public and hybrid cloud environments.</a:t>
+            </a:r>
+          </a:p>
+        </p:txBody>
+      </p:sp>
+      <p:sp>
+        <p:nvSpPr>
+          <p:cNvPr id="13" name="Rounded Rectangle 12"/>
+          <p:cNvSpPr/>
+          <p:nvPr/>
+        </p:nvSpPr>
+        <p:spPr>
+          <a:xfrm>
+            <a:off x="640080" y="1783080"/>
+            <a:ext cx="10927080" cy="914400"/>
+          </a:xfrm>
+          <a:prstGeom prst="roundRect">
+            <a:avLst/>
+          </a:prstGeom>
+          <a:solidFill>
+            <a:srgbClr val="F6F8FC"/>
+          </a:solidFill>
+          <a:ln w="12700">
+            <a:solidFill>
+              <a:srgbClr val="D2DCEB"/>
+            </a:solidFill>
+          </a:ln>
+        </p:spPr>
+        <p:style>
+          <a:lnRef idx="1">
+            <a:schemeClr val="accent1"/>
+          </a:lnRef>
+          <a:fillRef idx="3">
+            <a:schemeClr val="accent1"/>
+          </a:fillRef>
+          <a:effectRef idx="2">
+            <a:schemeClr val="accent1"/>
+          </a:effectRef>
+          <a:fontRef idx="minor">
+            <a:schemeClr val="lt1"/>
+          </a:fontRef>
+        </p:style>
+        <p:txBody>
+          <a:bodyPr rtlCol="0" anchor="ctr"/>
+          <a:lstStyle/>
+          <a:p>
+            <a:pPr algn="ctr"/>
+            <a:endParaRPr/>
+          </a:p>
+        </p:txBody>
+      </p:sp>
+      <p:sp>
+        <p:nvSpPr>
+          <p:cNvPr id="14" name="Rounded Rectangle 13"/>
+          <p:cNvSpPr/>
+          <p:nvPr/>
+        </p:nvSpPr>
+        <p:spPr>
+          <a:xfrm>
+            <a:off x="868680" y="1984248"/>
+            <a:ext cx="2331720" cy="502920"/>
+          </a:xfrm>
+          <a:prstGeom prst="roundRect">
+            <a:avLst/>
+          </a:prstGeom>
+          <a:solidFill>
+            <a:srgbClr val="FFFFFF"/>
+          </a:solidFill>
+          <a:ln>
+            <a:solidFill>
+              <a:srgbClr val="D2DCEB"/>
+            </a:solidFill>
+          </a:ln>
+        </p:spPr>
+        <p:style>
+          <a:lnRef idx="1">
+            <a:schemeClr val="accent1"/>
+          </a:lnRef>
+          <a:fillRef idx="3">
+            <a:schemeClr val="accent1"/>
+          </a:fillRef>
+          <a:effectRef idx="2">
+            <a:schemeClr val="accent1"/>
+          </a:effectRef>
+          <a:fontRef idx="minor">
+            <a:schemeClr val="lt1"/>
+          </a:fontRef>
+        </p:style>
+        <p:txBody>
+          <a:bodyPr rtlCol="0" anchor="ctr"/>
+          <a:lstStyle/>
+          <a:p>
+            <a:pPr algn="ctr"/>
+            <a:endParaRPr/>
+          </a:p>
+        </p:txBody>
+      </p:sp>
+      <p:sp>
+        <p:nvSpPr>
+          <p:cNvPr id="15" name="TextBox 14"/>
+          <p:cNvSpPr txBox="1"/>
+          <p:nvPr/>
+        </p:nvSpPr>
+        <p:spPr>
+          <a:xfrm>
+            <a:off x="960120" y="2048256"/>
+            <a:ext cx="2148840" cy="182880"/>
+          </a:xfrm>
+          <a:prstGeom prst="rect">
+            <a:avLst/>
+          </a:prstGeom>
+          <a:noFill/>
+        </p:spPr>
+        <p:txBody>
+          <a:bodyPr wrap="square">
+            <a:spAutoFit/>
+          </a:bodyPr>
+          <a:lstStyle/>
+          <a:p>
+            <a:pPr>
+              <a:defRPr sz="1200" b="1"/>
+            </a:pPr>
+            <a:r>
+              <a:rPr sz="1200" b="1"/>
+              <a:t>IaC and GitOps</a:t>
+            </a:r>
+          </a:p>
+        </p:txBody>
+      </p:sp>
+      <p:sp>
+        <p:nvSpPr>
+          <p:cNvPr id="16" name="TextBox 15"/>
+          <p:cNvSpPr txBox="1"/>
+          <p:nvPr/>
+        </p:nvSpPr>
+        <p:spPr>
+          <a:xfrm>
+            <a:off x="960120" y="2258568"/>
+            <a:ext cx="2148840" cy="164592"/>
+          </a:xfrm>
+          <a:prstGeom prst="rect">
+            <a:avLst/>
+          </a:prstGeom>
+          <a:noFill/>
+        </p:spPr>
+        <p:txBody>
+          <a:bodyPr wrap="square">
+            <a:spAutoFit/>
+          </a:bodyPr>
+          <a:lstStyle/>
+          <a:p>
+            <a:pPr>
+              <a:defRPr sz="900" b="0"/>
+            </a:pPr>
+            <a:r>
+              <a:rPr sz="900" b="0"/>
+              <a:t>cattle not pets</a:t>
+            </a:r>
+          </a:p>
+        </p:txBody>
+      </p:sp>
+      <p:sp>
+        <p:nvSpPr>
+          <p:cNvPr id="17" name="TextBox 16"/>
+          <p:cNvSpPr txBox="1"/>
+          <p:nvPr/>
+        </p:nvSpPr>
+        <p:spPr>
+          <a:xfrm>
+            <a:off x="3273552" y="2130552"/>
+            <a:ext cx="182880" cy="182880"/>
+          </a:xfrm>
+          <a:prstGeom prst="rect">
+            <a:avLst/>
+          </a:prstGeom>
+          <a:noFill/>
+        </p:spPr>
+        <p:txBody>
+          <a:bodyPr wrap="none">
+            <a:spAutoFit/>
+          </a:bodyPr>
+          <a:lstStyle/>
+          <a:p>
+            <a:pPr algn="ctr">
+              <a:defRPr sz="1400" b="1">
+                <a:solidFill>
+                  <a:srgbClr val="0056FF"/>
+                </a:solidFill>
+              </a:defRPr>
+            </a:pPr>
+            <a:r>
+              <a:t>→</a:t>
+            </a:r>
+          </a:p>
+        </p:txBody>
+      </p:sp>
+      <p:sp>
+        <p:nvSpPr>
+          <p:cNvPr id="18" name="Rounded Rectangle 17"/>
+          <p:cNvSpPr/>
+          <p:nvPr/>
+        </p:nvSpPr>
+        <p:spPr>
+          <a:xfrm>
+            <a:off x="3474720" y="1984248"/>
+            <a:ext cx="2331720" cy="502920"/>
+          </a:xfrm>
+          <a:prstGeom prst="roundRect">
+            <a:avLst/>
+          </a:prstGeom>
+          <a:solidFill>
+            <a:srgbClr val="FFFFFF"/>
+          </a:solidFill>
+          <a:ln>
+            <a:solidFill>
+              <a:srgbClr val="D2DCEB"/>
+            </a:solidFill>
+          </a:ln>
+        </p:spPr>
+        <p:style>
+          <a:lnRef idx="1">
+            <a:schemeClr val="accent1"/>
+          </a:lnRef>
+          <a:fillRef idx="3">
+            <a:schemeClr val="accent1"/>
+          </a:fillRef>
+          <a:effectRef idx="2">
+            <a:schemeClr val="accent1"/>
+          </a:effectRef>
+          <a:fontRef idx="minor">
+            <a:schemeClr val="lt1"/>
+          </a:fontRef>
+        </p:style>
+        <p:txBody>
+          <a:bodyPr rtlCol="0" anchor="ctr"/>
+          <a:lstStyle/>
+          <a:p>
+            <a:pPr algn="ctr"/>
+            <a:endParaRPr/>
+          </a:p>
+        </p:txBody>
+      </p:sp>
+      <p:sp>
+        <p:nvSpPr>
+          <p:cNvPr id="19" name="TextBox 18"/>
+          <p:cNvSpPr txBox="1"/>
+          <p:nvPr/>
+        </p:nvSpPr>
+        <p:spPr>
+          <a:xfrm>
+            <a:off x="3566160" y="2048256"/>
+            <a:ext cx="2148840" cy="182880"/>
+          </a:xfrm>
+          <a:prstGeom prst="rect">
+            <a:avLst/>
+          </a:prstGeom>
+          <a:noFill/>
+        </p:spPr>
+        <p:txBody>
+          <a:bodyPr wrap="square">
+            <a:spAutoFit/>
+          </a:bodyPr>
+          <a:lstStyle/>
+          <a:p>
+            <a:pPr>
+              <a:lnSpc>
+                <a:spcPct val="90000"/>
+              </a:lnSpc>
+              <a:defRPr sz="1200" b="1"/>
+            </a:pPr>
+            <a:r>
+              <a:rPr sz="1200" b="1"/>
+              <a:t>CI and CD</a:t>
+            </a:r>
+          </a:p>
+        </p:txBody>
+      </p:sp>
+      <p:sp>
+        <p:nvSpPr>
+          <p:cNvPr id="20" name="TextBox 19"/>
+          <p:cNvSpPr txBox="1"/>
+          <p:nvPr/>
+        </p:nvSpPr>
+        <p:spPr>
+          <a:xfrm>
+            <a:off x="3566160" y="2258568"/>
+            <a:ext cx="2148840" cy="164592"/>
+          </a:xfrm>
+          <a:prstGeom prst="rect">
+            <a:avLst/>
+          </a:prstGeom>
+          <a:noFill/>
+        </p:spPr>
+        <p:txBody>
+          <a:bodyPr wrap="square">
+            <a:spAutoFit/>
+          </a:bodyPr>
+          <a:lstStyle/>
+          <a:p>
+            <a:pPr>
+              <a:lnSpc>
+                <a:spcPct val="90000"/>
+              </a:lnSpc>
+              <a:defRPr sz="900" b="0"/>
+            </a:pPr>
+            <a:r>
+              <a:rPr sz="900" b="0"/>
+              <a:t>build, test, scan</a:t>
+            </a:r>
+          </a:p>
+        </p:txBody>
+      </p:sp>
+      <p:sp>
+        <p:nvSpPr>
+          <p:cNvPr id="21" name="TextBox 20"/>
+          <p:cNvSpPr txBox="1"/>
+          <p:nvPr/>
+        </p:nvSpPr>
+        <p:spPr>
+          <a:xfrm>
+            <a:off x="5879592" y="2130552"/>
+            <a:ext cx="182880" cy="182880"/>
+          </a:xfrm>
+          <a:prstGeom prst="rect">
+            <a:avLst/>
+          </a:prstGeom>
+          <a:noFill/>
+        </p:spPr>
+        <p:txBody>
+          <a:bodyPr wrap="none">
+            <a:spAutoFit/>
+          </a:bodyPr>
+          <a:lstStyle/>
+          <a:p>
+            <a:pPr algn="ctr">
+              <a:defRPr sz="1400" b="1">
+                <a:solidFill>
+                  <a:srgbClr val="0056FF"/>
+                </a:solidFill>
+              </a:defRPr>
+            </a:pPr>
+            <a:r>
+              <a:t>→</a:t>
+            </a:r>
+          </a:p>
+        </p:txBody>
+      </p:sp>
+      <p:sp>
+        <p:nvSpPr>
+          <p:cNvPr id="22" name="Rounded Rectangle 21"/>
+          <p:cNvSpPr/>
+          <p:nvPr/>
+        </p:nvSpPr>
+        <p:spPr>
+          <a:xfrm>
+            <a:off x="6080760" y="1984248"/>
+            <a:ext cx="2331720" cy="502920"/>
+          </a:xfrm>
+          <a:prstGeom prst="roundRect">
+            <a:avLst/>
+          </a:prstGeom>
+          <a:solidFill>
+            <a:srgbClr val="FFFFFF"/>
+          </a:solidFill>
+          <a:ln>
+            <a:solidFill>
+              <a:srgbClr val="D2DCEB"/>
+            </a:solidFill>
+          </a:ln>
+        </p:spPr>
+        <p:style>
+          <a:lnRef idx="1">
+            <a:schemeClr val="accent1"/>
+          </a:lnRef>
+          <a:fillRef idx="3">
+            <a:schemeClr val="accent1"/>
+          </a:fillRef>
+          <a:effectRef idx="2">
+            <a:schemeClr val="accent1"/>
+          </a:effectRef>
+          <a:fontRef idx="minor">
+            <a:schemeClr val="lt1"/>
+          </a:fontRef>
+        </p:style>
+        <p:txBody>
+          <a:bodyPr rtlCol="0" anchor="ctr"/>
+          <a:lstStyle/>
+          <a:p>
+            <a:pPr algn="ctr"/>
+            <a:endParaRPr/>
+          </a:p>
+        </p:txBody>
+      </p:sp>
+      <p:sp>
+        <p:nvSpPr>
+          <p:cNvPr id="23" name="TextBox 22"/>
+          <p:cNvSpPr txBox="1"/>
+          <p:nvPr/>
+        </p:nvSpPr>
+        <p:spPr>
+          <a:xfrm>
+            <a:off x="6172200" y="2048256"/>
+            <a:ext cx="2148840" cy="182880"/>
+          </a:xfrm>
+          <a:prstGeom prst="rect">
+            <a:avLst/>
+          </a:prstGeom>
+          <a:noFill/>
+        </p:spPr>
+        <p:txBody>
+          <a:bodyPr wrap="square">
+            <a:spAutoFit/>
+          </a:bodyPr>
+          <a:lstStyle/>
+          <a:p>
+            <a:pPr>
+              <a:lnSpc>
+                <a:spcPct val="90000"/>
+              </a:lnSpc>
+              <a:defRPr sz="1200" b="1"/>
+            </a:pPr>
+            <a:r>
+              <a:rPr sz="1200" b="1"/>
+              <a:t>Vault</a:t>
+            </a:r>
+          </a:p>
+        </p:txBody>
+      </p:sp>
+      <p:sp>
+        <p:nvSpPr>
+          <p:cNvPr id="24" name="TextBox 23"/>
+          <p:cNvSpPr txBox="1"/>
+          <p:nvPr/>
+        </p:nvSpPr>
+        <p:spPr>
+          <a:xfrm>
+            <a:off x="6172200" y="2258568"/>
+            <a:ext cx="2148840" cy="164592"/>
+          </a:xfrm>
+          <a:prstGeom prst="rect">
+            <a:avLst/>
+          </a:prstGeom>
+          <a:noFill/>
+        </p:spPr>
+        <p:txBody>
+          <a:bodyPr wrap="square">
+            <a:spAutoFit/>
+          </a:bodyPr>
+          <a:lstStyle/>
+          <a:p>
+            <a:pPr>
+              <a:lnSpc>
+                <a:spcPct val="90000"/>
+              </a:lnSpc>
+              <a:defRPr sz="900" b="0"/>
+            </a:pPr>
+            <a:r>
+              <a:rPr sz="900" b="0"/>
+              <a:t>keys and secrets</a:t>
+            </a:r>
+          </a:p>
+        </p:txBody>
+      </p:sp>
+      <p:sp>
+        <p:nvSpPr>
+          <p:cNvPr id="25" name="TextBox 24"/>
+          <p:cNvSpPr txBox="1"/>
+          <p:nvPr/>
+        </p:nvSpPr>
+        <p:spPr>
+          <a:xfrm>
+            <a:off x="8485632" y="2130552"/>
+            <a:ext cx="182880" cy="182880"/>
+          </a:xfrm>
+          <a:prstGeom prst="rect">
+            <a:avLst/>
+          </a:prstGeom>
+          <a:noFill/>
+        </p:spPr>
+        <p:txBody>
+          <a:bodyPr wrap="none">
+            <a:spAutoFit/>
+          </a:bodyPr>
+          <a:lstStyle/>
+          <a:p>
+            <a:pPr algn="ctr">
+              <a:defRPr sz="1400" b="1">
+                <a:solidFill>
+                  <a:srgbClr val="0056FF"/>
+                </a:solidFill>
+              </a:defRPr>
+            </a:pPr>
+            <a:r>
+              <a:t>→</a:t>
+            </a:r>
+          </a:p>
+        </p:txBody>
+      </p:sp>
+      <p:sp>
+        <p:nvSpPr>
+          <p:cNvPr id="26" name="Rounded Rectangle 25"/>
+          <p:cNvSpPr/>
+          <p:nvPr/>
+        </p:nvSpPr>
+        <p:spPr>
+          <a:xfrm>
+            <a:off x="8686800" y="1984248"/>
+            <a:ext cx="2331720" cy="502920"/>
+          </a:xfrm>
+          <a:prstGeom prst="roundRect">
+            <a:avLst/>
+          </a:prstGeom>
+          <a:solidFill>
+            <a:srgbClr val="FFFFFF"/>
+          </a:solidFill>
+          <a:ln>
+            <a:solidFill>
+              <a:srgbClr val="D2DCEB"/>
+            </a:solidFill>
+          </a:ln>
+        </p:spPr>
+        <p:style>
+          <a:lnRef idx="1">
+            <a:schemeClr val="accent1"/>
+          </a:lnRef>
+          <a:fillRef idx="3">
+            <a:schemeClr val="accent1"/>
+          </a:fillRef>
+          <a:effectRef idx="2">
+            <a:schemeClr val="accent1"/>
+          </a:effectRef>
+          <a:fontRef idx="minor">
+            <a:schemeClr val="lt1"/>
+          </a:fontRef>
+        </p:style>
+        <p:txBody>
+          <a:bodyPr rtlCol="0" anchor="ctr"/>
+          <a:lstStyle/>
+          <a:p>
+            <a:pPr algn="ctr"/>
+            <a:endParaRPr/>
+          </a:p>
+        </p:txBody>
+      </p:sp>
+      <p:sp>
+        <p:nvSpPr>
+          <p:cNvPr id="27" name="TextBox 26"/>
+          <p:cNvSpPr txBox="1"/>
+          <p:nvPr/>
+        </p:nvSpPr>
+        <p:spPr>
+          <a:xfrm>
+            <a:off x="8778240" y="2048256"/>
+            <a:ext cx="2148840" cy="182880"/>
+          </a:xfrm>
+          <a:prstGeom prst="rect">
+            <a:avLst/>
+          </a:prstGeom>
+          <a:noFill/>
+        </p:spPr>
+        <p:txBody>
+          <a:bodyPr wrap="square">
+            <a:spAutoFit/>
+          </a:bodyPr>
+          <a:lstStyle/>
+          <a:p>
+            <a:pPr>
+              <a:lnSpc>
+                <a:spcPct val="90000"/>
+              </a:lnSpc>
+              <a:defRPr sz="1200" b="1"/>
+            </a:pPr>
+            <a:r>
+              <a:rPr sz="1200" b="1"/>
+              <a:t>Kubernetes</a:t>
+            </a:r>
+          </a:p>
+        </p:txBody>
+      </p:sp>
+      <p:sp>
+        <p:nvSpPr>
+          <p:cNvPr id="28" name="TextBox 27"/>
+          <p:cNvSpPr txBox="1"/>
+          <p:nvPr/>
+        </p:nvSpPr>
+        <p:spPr>
+          <a:xfrm>
+            <a:off x="8778240" y="2258568"/>
+            <a:ext cx="2148840" cy="164592"/>
+          </a:xfrm>
+          <a:prstGeom prst="rect">
+            <a:avLst/>
+          </a:prstGeom>
+          <a:noFill/>
+        </p:spPr>
+        <p:txBody>
+          <a:bodyPr wrap="square">
+            <a:spAutoFit/>
+          </a:bodyPr>
+          <a:lstStyle/>
+          <a:p>
+            <a:pPr>
+              <a:lnSpc>
+                <a:spcPct val="90000"/>
+              </a:lnSpc>
+              <a:defRPr sz="900" b="0"/>
+            </a:pPr>
+            <a:r>
+              <a:rPr sz="900" b="0"/>
+              <a:t>elastic runtime</a:t>
+            </a:r>
+          </a:p>
+        </p:txBody>
+      </p:sp>
+      <p:sp>
+        <p:nvSpPr>
+          <p:cNvPr id="29" name="Rounded Rectangle 28"/>
+          <p:cNvSpPr/>
+          <p:nvPr/>
+        </p:nvSpPr>
+        <p:spPr>
+          <a:xfrm>
+            <a:off x="640080" y="3063240"/>
+            <a:ext cx="3383280" cy="1234440"/>
+          </a:xfrm>
+          <a:prstGeom prst="roundRect">
+            <a:avLst/>
+          </a:prstGeom>
+          <a:solidFill>
+            <a:srgbClr val="FFFFFF"/>
+          </a:solidFill>
+          <a:ln>
+            <a:solidFill>
+              <a:srgbClr val="D2DCEB"/>
+            </a:solidFill>
+          </a:ln>
+        </p:spPr>
+        <p:style>
+          <a:lnRef idx="1">
+            <a:schemeClr val="accent1"/>
+          </a:lnRef>
+          <a:fillRef idx="3">
+            <a:schemeClr val="accent1"/>
+          </a:fillRef>
+          <a:effectRef idx="2">
+            <a:schemeClr val="accent1"/>
+          </a:effectRef>
+          <a:fontRef idx="minor">
+            <a:schemeClr val="lt1"/>
+          </a:fontRef>
+        </p:style>
+        <p:txBody>
+          <a:bodyPr rtlCol="0" anchor="ctr"/>
+          <a:lstStyle/>
+          <a:p>
+            <a:pPr algn="ctr"/>
+            <a:endParaRPr/>
+          </a:p>
+        </p:txBody>
+      </p:sp>
+      <p:sp>
+        <p:nvSpPr>
+          <p:cNvPr id="30" name="Rectangle 29"/>
+          <p:cNvSpPr/>
+          <p:nvPr/>
+        </p:nvSpPr>
+        <p:spPr>
+          <a:xfrm>
+            <a:off x="640080" y="3063240"/>
+            <a:ext cx="91440" cy="1234440"/>
+          </a:xfrm>
+          <a:prstGeom prst="rect">
+            <a:avLst/>
+          </a:prstGeom>
+          <a:solidFill>
+            <a:srgbClr val="0056FF"/>
+          </a:solidFill>
+          <a:ln>
+            <a:noFill/>
+          </a:ln>
+        </p:spPr>
+        <p:style>
+          <a:lnRef idx="1">
+            <a:schemeClr val="accent1"/>
+          </a:lnRef>
+          <a:fillRef idx="3">
+            <a:schemeClr val="accent1"/>
+          </a:fillRef>
+          <a:effectRef idx="2">
+            <a:schemeClr val="accent1"/>
+          </a:effectRef>
+          <a:fontRef idx="minor">
+            <a:schemeClr val="lt1"/>
+          </a:fontRef>
+        </p:style>
+        <p:txBody>
+          <a:bodyPr rtlCol="0" anchor="ctr"/>
+          <a:lstStyle/>
+          <a:p>
+            <a:pPr algn="ctr"/>
+            <a:endParaRPr/>
+          </a:p>
+        </p:txBody>
+      </p:sp>
+      <p:sp>
+        <p:nvSpPr>
+          <p:cNvPr id="31" name="TextBox 30"/>
+          <p:cNvSpPr txBox="1"/>
+          <p:nvPr/>
+        </p:nvSpPr>
+        <p:spPr>
+          <a:xfrm>
+            <a:off x="896112" y="3246120"/>
+            <a:ext cx="2971800" cy="228600"/>
           </a:xfrm>
           <a:prstGeom prst="rect">
             <a:avLst/>
@@ -2589,46 +3317,69 @@
               <a:defRPr sz="1300" b="0"/>
             </a:pPr>
             <a:r>
-              <a:rPr sz="1300" b="0" dirty="0"/>
-              <a:t>Infrastructure is defined as code and promoted through governed delivery. Kubernetes </a:t>
-            </a:r>
-            <a:r>
-              <a:rPr lang="en-AU" sz="1300" b="0" dirty="0"/>
-              <a:t>, Prometheus </a:t>
-            </a:r>
-            <a:r>
-              <a:rPr sz="1300" b="0" dirty="0"/>
-              <a:t>telemetry</a:t>
-            </a:r>
-            <a:r>
-              <a:rPr lang="en-AU" sz="1300" b="0" dirty="0"/>
-              <a:t>, Application monitoring</a:t>
-            </a:r>
-            <a:r>
-              <a:rPr sz="1300" b="0" dirty="0"/>
-              <a:t> and dashboards support elastic scaling in public and hybrid cloud environments.</a:t>
-            </a:r>
-          </a:p>
-        </p:txBody>
-      </p:sp>
-      <p:sp>
-        <p:nvSpPr>
-          <p:cNvPr id="13" name="Rounded Rectangle 12"/>
-          <p:cNvSpPr/>
-          <p:nvPr/>
-        </p:nvSpPr>
-        <p:spPr>
-          <a:xfrm>
-            <a:off x="640080" y="1783080"/>
-            <a:ext cx="10927080" cy="914400"/>
+              <a:rPr sz="1300" b="0"/>
+              <a:t>GitOps delivery</a:t>
+            </a:r>
+          </a:p>
+        </p:txBody>
+      </p:sp>
+      <p:sp>
+        <p:nvSpPr>
+          <p:cNvPr id="32" name="TextBox 31"/>
+          <p:cNvSpPr txBox="1"/>
+          <p:nvPr/>
+        </p:nvSpPr>
+        <p:spPr>
+          <a:xfrm>
+            <a:off x="896112" y="3593592"/>
+            <a:ext cx="2971800" cy="640080"/>
+          </a:xfrm>
+          <a:prstGeom prst="rect">
+            <a:avLst/>
+          </a:prstGeom>
+          <a:noFill/>
+        </p:spPr>
+        <p:txBody>
+          <a:bodyPr wrap="square">
+            <a:spAutoFit/>
+          </a:bodyPr>
+          <a:lstStyle/>
+          <a:p>
+            <a:pPr>
+              <a:lnSpc>
+                <a:spcPct val="90000"/>
+              </a:lnSpc>
+              <a:defRPr sz="950" b="0"/>
+            </a:pPr>
+            <a:r>
+              <a:rPr sz="950" b="0" dirty="0" err="1"/>
+              <a:t>GitOps</a:t>
+            </a:r>
+            <a:r>
+              <a:rPr sz="950" b="0" dirty="0"/>
+              <a:t> keeps application and infrastructure desired state reviewable, versioned and repeatable before promotion.</a:t>
+            </a:r>
+          </a:p>
+        </p:txBody>
+      </p:sp>
+      <p:sp>
+        <p:nvSpPr>
+          <p:cNvPr id="33" name="Rounded Rectangle 32"/>
+          <p:cNvSpPr/>
+          <p:nvPr/>
+        </p:nvSpPr>
+        <p:spPr>
+          <a:xfrm>
+            <a:off x="4343400" y="3063240"/>
+            <a:ext cx="3383280" cy="1234440"/>
           </a:xfrm>
           <a:prstGeom prst="roundRect">
             <a:avLst/>
           </a:prstGeom>
           <a:solidFill>
-            <a:srgbClr val="F6F8FC"/>
-          </a:solidFill>
-          <a:ln w="12700">
+            <a:srgbClr val="FFFFFF"/>
+          </a:solidFill>
+          <a:ln>
             <a:solidFill>
               <a:srgbClr val="D2DCEB"/>
             </a:solidFill>
@@ -2659,25 +3410,23 @@
       </p:sp>
       <p:sp>
         <p:nvSpPr>
-          <p:cNvPr id="14" name="Rounded Rectangle 13"/>
-          <p:cNvSpPr/>
-          <p:nvPr/>
-        </p:nvSpPr>
-        <p:spPr>
-          <a:xfrm>
-            <a:off x="868680" y="1984248"/>
-            <a:ext cx="2331720" cy="502920"/>
-          </a:xfrm>
-          <a:prstGeom prst="roundRect">
-            <a:avLst/>
-          </a:prstGeom>
-          <a:solidFill>
-            <a:srgbClr val="FFFFFF"/>
+          <p:cNvPr id="34" name="Rectangle 33"/>
+          <p:cNvSpPr/>
+          <p:nvPr/>
+        </p:nvSpPr>
+        <p:spPr>
+          <a:xfrm>
+            <a:off x="4343400" y="3063240"/>
+            <a:ext cx="91440" cy="1234440"/>
+          </a:xfrm>
+          <a:prstGeom prst="rect">
+            <a:avLst/>
+          </a:prstGeom>
+          <a:solidFill>
+            <a:srgbClr val="7037FF"/>
           </a:solidFill>
           <a:ln>
-            <a:solidFill>
-              <a:srgbClr val="D2DCEB"/>
-            </a:solidFill>
+            <a:noFill/>
           </a:ln>
         </p:spPr>
         <p:style>
@@ -2705,620 +3454,13 @@
       </p:sp>
       <p:sp>
         <p:nvSpPr>
-          <p:cNvPr id="15" name="TextBox 14"/>
+          <p:cNvPr id="35" name="TextBox 34"/>
           <p:cNvSpPr txBox="1"/>
           <p:nvPr/>
         </p:nvSpPr>
         <p:spPr>
           <a:xfrm>
-            <a:off x="960120" y="2048256"/>
-            <a:ext cx="2148840" cy="182880"/>
-          </a:xfrm>
-          <a:prstGeom prst="rect">
-            <a:avLst/>
-          </a:prstGeom>
-          <a:noFill/>
-        </p:spPr>
-        <p:txBody>
-          <a:bodyPr wrap="square">
-            <a:spAutoFit/>
-          </a:bodyPr>
-          <a:lstStyle/>
-          <a:p>
-            <a:pPr>
-              <a:defRPr sz="1200" b="1"/>
-            </a:pPr>
-            <a:r>
-              <a:rPr sz="1200" b="1"/>
-              <a:t>IaC and GitOps</a:t>
-            </a:r>
-          </a:p>
-        </p:txBody>
-      </p:sp>
-      <p:sp>
-        <p:nvSpPr>
-          <p:cNvPr id="16" name="TextBox 15"/>
-          <p:cNvSpPr txBox="1"/>
-          <p:nvPr/>
-        </p:nvSpPr>
-        <p:spPr>
-          <a:xfrm>
-            <a:off x="960120" y="2258568"/>
-            <a:ext cx="2148840" cy="164592"/>
-          </a:xfrm>
-          <a:prstGeom prst="rect">
-            <a:avLst/>
-          </a:prstGeom>
-          <a:noFill/>
-        </p:spPr>
-        <p:txBody>
-          <a:bodyPr wrap="square">
-            <a:spAutoFit/>
-          </a:bodyPr>
-          <a:lstStyle/>
-          <a:p>
-            <a:pPr>
-              <a:defRPr sz="900" b="0"/>
-            </a:pPr>
-            <a:r>
-              <a:rPr sz="900" b="0"/>
-              <a:t>cattle not pets</a:t>
-            </a:r>
-          </a:p>
-        </p:txBody>
-      </p:sp>
-      <p:sp>
-        <p:nvSpPr>
-          <p:cNvPr id="17" name="TextBox 16"/>
-          <p:cNvSpPr txBox="1"/>
-          <p:nvPr/>
-        </p:nvSpPr>
-        <p:spPr>
-          <a:xfrm>
-            <a:off x="3273552" y="2130552"/>
-            <a:ext cx="182880" cy="182880"/>
-          </a:xfrm>
-          <a:prstGeom prst="rect">
-            <a:avLst/>
-          </a:prstGeom>
-          <a:noFill/>
-        </p:spPr>
-        <p:txBody>
-          <a:bodyPr wrap="none">
-            <a:spAutoFit/>
-          </a:bodyPr>
-          <a:lstStyle/>
-          <a:p>
-            <a:pPr algn="ctr">
-              <a:defRPr sz="1400" b="1">
-                <a:solidFill>
-                  <a:srgbClr val="0056FF"/>
-                </a:solidFill>
-              </a:defRPr>
-            </a:pPr>
-            <a:r>
-              <a:t>→</a:t>
-            </a:r>
-          </a:p>
-        </p:txBody>
-      </p:sp>
-      <p:sp>
-        <p:nvSpPr>
-          <p:cNvPr id="18" name="Rounded Rectangle 17"/>
-          <p:cNvSpPr/>
-          <p:nvPr/>
-        </p:nvSpPr>
-        <p:spPr>
-          <a:xfrm>
-            <a:off x="3474720" y="1984248"/>
-            <a:ext cx="2331720" cy="502920"/>
-          </a:xfrm>
-          <a:prstGeom prst="roundRect">
-            <a:avLst/>
-          </a:prstGeom>
-          <a:solidFill>
-            <a:srgbClr val="FFFFFF"/>
-          </a:solidFill>
-          <a:ln>
-            <a:solidFill>
-              <a:srgbClr val="D2DCEB"/>
-            </a:solidFill>
-          </a:ln>
-        </p:spPr>
-        <p:style>
-          <a:lnRef idx="1">
-            <a:schemeClr val="accent1"/>
-          </a:lnRef>
-          <a:fillRef idx="3">
-            <a:schemeClr val="accent1"/>
-          </a:fillRef>
-          <a:effectRef idx="2">
-            <a:schemeClr val="accent1"/>
-          </a:effectRef>
-          <a:fontRef idx="minor">
-            <a:schemeClr val="lt1"/>
-          </a:fontRef>
-        </p:style>
-        <p:txBody>
-          <a:bodyPr rtlCol="0" anchor="ctr"/>
-          <a:lstStyle/>
-          <a:p>
-            <a:pPr algn="ctr"/>
-            <a:endParaRPr/>
-          </a:p>
-        </p:txBody>
-      </p:sp>
-      <p:sp>
-        <p:nvSpPr>
-          <p:cNvPr id="19" name="TextBox 18"/>
-          <p:cNvSpPr txBox="1"/>
-          <p:nvPr/>
-        </p:nvSpPr>
-        <p:spPr>
-          <a:xfrm>
-            <a:off x="3566160" y="2048256"/>
-            <a:ext cx="2148840" cy="182880"/>
-          </a:xfrm>
-          <a:prstGeom prst="rect">
-            <a:avLst/>
-          </a:prstGeom>
-          <a:noFill/>
-        </p:spPr>
-        <p:txBody>
-          <a:bodyPr wrap="square">
-            <a:spAutoFit/>
-          </a:bodyPr>
-          <a:lstStyle/>
-          <a:p>
-            <a:pPr>
-              <a:lnSpc>
-                <a:spcPct val="90000"/>
-              </a:lnSpc>
-              <a:defRPr sz="1200" b="1"/>
-            </a:pPr>
-            <a:r>
-              <a:rPr sz="1200" b="1"/>
-              <a:t>CI and CD</a:t>
-            </a:r>
-          </a:p>
-        </p:txBody>
-      </p:sp>
-      <p:sp>
-        <p:nvSpPr>
-          <p:cNvPr id="20" name="TextBox 19"/>
-          <p:cNvSpPr txBox="1"/>
-          <p:nvPr/>
-        </p:nvSpPr>
-        <p:spPr>
-          <a:xfrm>
-            <a:off x="3566160" y="2258568"/>
-            <a:ext cx="2148840" cy="164592"/>
-          </a:xfrm>
-          <a:prstGeom prst="rect">
-            <a:avLst/>
-          </a:prstGeom>
-          <a:noFill/>
-        </p:spPr>
-        <p:txBody>
-          <a:bodyPr wrap="square">
-            <a:spAutoFit/>
-          </a:bodyPr>
-          <a:lstStyle/>
-          <a:p>
-            <a:pPr>
-              <a:lnSpc>
-                <a:spcPct val="90000"/>
-              </a:lnSpc>
-              <a:defRPr sz="900" b="0"/>
-            </a:pPr>
-            <a:r>
-              <a:rPr sz="900" b="0"/>
-              <a:t>build, test, scan</a:t>
-            </a:r>
-          </a:p>
-        </p:txBody>
-      </p:sp>
-      <p:sp>
-        <p:nvSpPr>
-          <p:cNvPr id="21" name="TextBox 20"/>
-          <p:cNvSpPr txBox="1"/>
-          <p:nvPr/>
-        </p:nvSpPr>
-        <p:spPr>
-          <a:xfrm>
-            <a:off x="5879592" y="2130552"/>
-            <a:ext cx="182880" cy="182880"/>
-          </a:xfrm>
-          <a:prstGeom prst="rect">
-            <a:avLst/>
-          </a:prstGeom>
-          <a:noFill/>
-        </p:spPr>
-        <p:txBody>
-          <a:bodyPr wrap="none">
-            <a:spAutoFit/>
-          </a:bodyPr>
-          <a:lstStyle/>
-          <a:p>
-            <a:pPr algn="ctr">
-              <a:defRPr sz="1400" b="1">
-                <a:solidFill>
-                  <a:srgbClr val="0056FF"/>
-                </a:solidFill>
-              </a:defRPr>
-            </a:pPr>
-            <a:r>
-              <a:t>→</a:t>
-            </a:r>
-          </a:p>
-        </p:txBody>
-      </p:sp>
-      <p:sp>
-        <p:nvSpPr>
-          <p:cNvPr id="22" name="Rounded Rectangle 21"/>
-          <p:cNvSpPr/>
-          <p:nvPr/>
-        </p:nvSpPr>
-        <p:spPr>
-          <a:xfrm>
-            <a:off x="6080760" y="1984248"/>
-            <a:ext cx="2331720" cy="502920"/>
-          </a:xfrm>
-          <a:prstGeom prst="roundRect">
-            <a:avLst/>
-          </a:prstGeom>
-          <a:solidFill>
-            <a:srgbClr val="FFFFFF"/>
-          </a:solidFill>
-          <a:ln>
-            <a:solidFill>
-              <a:srgbClr val="D2DCEB"/>
-            </a:solidFill>
-          </a:ln>
-        </p:spPr>
-        <p:style>
-          <a:lnRef idx="1">
-            <a:schemeClr val="accent1"/>
-          </a:lnRef>
-          <a:fillRef idx="3">
-            <a:schemeClr val="accent1"/>
-          </a:fillRef>
-          <a:effectRef idx="2">
-            <a:schemeClr val="accent1"/>
-          </a:effectRef>
-          <a:fontRef idx="minor">
-            <a:schemeClr val="lt1"/>
-          </a:fontRef>
-        </p:style>
-        <p:txBody>
-          <a:bodyPr rtlCol="0" anchor="ctr"/>
-          <a:lstStyle/>
-          <a:p>
-            <a:pPr algn="ctr"/>
-            <a:endParaRPr/>
-          </a:p>
-        </p:txBody>
-      </p:sp>
-      <p:sp>
-        <p:nvSpPr>
-          <p:cNvPr id="23" name="TextBox 22"/>
-          <p:cNvSpPr txBox="1"/>
-          <p:nvPr/>
-        </p:nvSpPr>
-        <p:spPr>
-          <a:xfrm>
-            <a:off x="6172200" y="2048256"/>
-            <a:ext cx="2148840" cy="182880"/>
-          </a:xfrm>
-          <a:prstGeom prst="rect">
-            <a:avLst/>
-          </a:prstGeom>
-          <a:noFill/>
-        </p:spPr>
-        <p:txBody>
-          <a:bodyPr wrap="square">
-            <a:spAutoFit/>
-          </a:bodyPr>
-          <a:lstStyle/>
-          <a:p>
-            <a:pPr>
-              <a:lnSpc>
-                <a:spcPct val="90000"/>
-              </a:lnSpc>
-              <a:defRPr sz="1200" b="1"/>
-            </a:pPr>
-            <a:r>
-              <a:rPr sz="1200" b="1"/>
-              <a:t>Vault</a:t>
-            </a:r>
-          </a:p>
-        </p:txBody>
-      </p:sp>
-      <p:sp>
-        <p:nvSpPr>
-          <p:cNvPr id="24" name="TextBox 23"/>
-          <p:cNvSpPr txBox="1"/>
-          <p:nvPr/>
-        </p:nvSpPr>
-        <p:spPr>
-          <a:xfrm>
-            <a:off x="6172200" y="2258568"/>
-            <a:ext cx="2148840" cy="164592"/>
-          </a:xfrm>
-          <a:prstGeom prst="rect">
-            <a:avLst/>
-          </a:prstGeom>
-          <a:noFill/>
-        </p:spPr>
-        <p:txBody>
-          <a:bodyPr wrap="square">
-            <a:spAutoFit/>
-          </a:bodyPr>
-          <a:lstStyle/>
-          <a:p>
-            <a:pPr>
-              <a:lnSpc>
-                <a:spcPct val="90000"/>
-              </a:lnSpc>
-              <a:defRPr sz="900" b="0"/>
-            </a:pPr>
-            <a:r>
-              <a:rPr sz="900" b="0"/>
-              <a:t>keys and secrets</a:t>
-            </a:r>
-          </a:p>
-        </p:txBody>
-      </p:sp>
-      <p:sp>
-        <p:nvSpPr>
-          <p:cNvPr id="25" name="TextBox 24"/>
-          <p:cNvSpPr txBox="1"/>
-          <p:nvPr/>
-        </p:nvSpPr>
-        <p:spPr>
-          <a:xfrm>
-            <a:off x="8485632" y="2130552"/>
-            <a:ext cx="182880" cy="182880"/>
-          </a:xfrm>
-          <a:prstGeom prst="rect">
-            <a:avLst/>
-          </a:prstGeom>
-          <a:noFill/>
-        </p:spPr>
-        <p:txBody>
-          <a:bodyPr wrap="none">
-            <a:spAutoFit/>
-          </a:bodyPr>
-          <a:lstStyle/>
-          <a:p>
-            <a:pPr algn="ctr">
-              <a:defRPr sz="1400" b="1">
-                <a:solidFill>
-                  <a:srgbClr val="0056FF"/>
-                </a:solidFill>
-              </a:defRPr>
-            </a:pPr>
-            <a:r>
-              <a:t>→</a:t>
-            </a:r>
-          </a:p>
-        </p:txBody>
-      </p:sp>
-      <p:sp>
-        <p:nvSpPr>
-          <p:cNvPr id="26" name="Rounded Rectangle 25"/>
-          <p:cNvSpPr/>
-          <p:nvPr/>
-        </p:nvSpPr>
-        <p:spPr>
-          <a:xfrm>
-            <a:off x="8686800" y="1984248"/>
-            <a:ext cx="2331720" cy="502920"/>
-          </a:xfrm>
-          <a:prstGeom prst="roundRect">
-            <a:avLst/>
-          </a:prstGeom>
-          <a:solidFill>
-            <a:srgbClr val="FFFFFF"/>
-          </a:solidFill>
-          <a:ln>
-            <a:solidFill>
-              <a:srgbClr val="D2DCEB"/>
-            </a:solidFill>
-          </a:ln>
-        </p:spPr>
-        <p:style>
-          <a:lnRef idx="1">
-            <a:schemeClr val="accent1"/>
-          </a:lnRef>
-          <a:fillRef idx="3">
-            <a:schemeClr val="accent1"/>
-          </a:fillRef>
-          <a:effectRef idx="2">
-            <a:schemeClr val="accent1"/>
-          </a:effectRef>
-          <a:fontRef idx="minor">
-            <a:schemeClr val="lt1"/>
-          </a:fontRef>
-        </p:style>
-        <p:txBody>
-          <a:bodyPr rtlCol="0" anchor="ctr"/>
-          <a:lstStyle/>
-          <a:p>
-            <a:pPr algn="ctr"/>
-            <a:endParaRPr/>
-          </a:p>
-        </p:txBody>
-      </p:sp>
-      <p:sp>
-        <p:nvSpPr>
-          <p:cNvPr id="27" name="TextBox 26"/>
-          <p:cNvSpPr txBox="1"/>
-          <p:nvPr/>
-        </p:nvSpPr>
-        <p:spPr>
-          <a:xfrm>
-            <a:off x="8778240" y="2048256"/>
-            <a:ext cx="2148840" cy="182880"/>
-          </a:xfrm>
-          <a:prstGeom prst="rect">
-            <a:avLst/>
-          </a:prstGeom>
-          <a:noFill/>
-        </p:spPr>
-        <p:txBody>
-          <a:bodyPr wrap="square">
-            <a:spAutoFit/>
-          </a:bodyPr>
-          <a:lstStyle/>
-          <a:p>
-            <a:pPr>
-              <a:lnSpc>
-                <a:spcPct val="90000"/>
-              </a:lnSpc>
-              <a:defRPr sz="1200" b="1"/>
-            </a:pPr>
-            <a:r>
-              <a:rPr sz="1200" b="1"/>
-              <a:t>Kubernetes</a:t>
-            </a:r>
-          </a:p>
-        </p:txBody>
-      </p:sp>
-      <p:sp>
-        <p:nvSpPr>
-          <p:cNvPr id="28" name="TextBox 27"/>
-          <p:cNvSpPr txBox="1"/>
-          <p:nvPr/>
-        </p:nvSpPr>
-        <p:spPr>
-          <a:xfrm>
-            <a:off x="8778240" y="2258568"/>
-            <a:ext cx="2148840" cy="164592"/>
-          </a:xfrm>
-          <a:prstGeom prst="rect">
-            <a:avLst/>
-          </a:prstGeom>
-          <a:noFill/>
-        </p:spPr>
-        <p:txBody>
-          <a:bodyPr wrap="square">
-            <a:spAutoFit/>
-          </a:bodyPr>
-          <a:lstStyle/>
-          <a:p>
-            <a:pPr>
-              <a:lnSpc>
-                <a:spcPct val="90000"/>
-              </a:lnSpc>
-              <a:defRPr sz="900" b="0"/>
-            </a:pPr>
-            <a:r>
-              <a:rPr sz="900" b="0"/>
-              <a:t>elastic runtime</a:t>
-            </a:r>
-          </a:p>
-        </p:txBody>
-      </p:sp>
-      <p:sp>
-        <p:nvSpPr>
-          <p:cNvPr id="29" name="Rounded Rectangle 28"/>
-          <p:cNvSpPr/>
-          <p:nvPr/>
-        </p:nvSpPr>
-        <p:spPr>
-          <a:xfrm>
-            <a:off x="640080" y="3063240"/>
-            <a:ext cx="3383280" cy="1234440"/>
-          </a:xfrm>
-          <a:prstGeom prst="roundRect">
-            <a:avLst/>
-          </a:prstGeom>
-          <a:solidFill>
-            <a:srgbClr val="FFFFFF"/>
-          </a:solidFill>
-          <a:ln>
-            <a:solidFill>
-              <a:srgbClr val="D2DCEB"/>
-            </a:solidFill>
-          </a:ln>
-        </p:spPr>
-        <p:style>
-          <a:lnRef idx="1">
-            <a:schemeClr val="accent1"/>
-          </a:lnRef>
-          <a:fillRef idx="3">
-            <a:schemeClr val="accent1"/>
-          </a:fillRef>
-          <a:effectRef idx="2">
-            <a:schemeClr val="accent1"/>
-          </a:effectRef>
-          <a:fontRef idx="minor">
-            <a:schemeClr val="lt1"/>
-          </a:fontRef>
-        </p:style>
-        <p:txBody>
-          <a:bodyPr rtlCol="0" anchor="ctr"/>
-          <a:lstStyle/>
-          <a:p>
-            <a:pPr algn="ctr"/>
-            <a:endParaRPr/>
-          </a:p>
-        </p:txBody>
-      </p:sp>
-      <p:sp>
-        <p:nvSpPr>
-          <p:cNvPr id="30" name="Rectangle 29"/>
-          <p:cNvSpPr/>
-          <p:nvPr/>
-        </p:nvSpPr>
-        <p:spPr>
-          <a:xfrm>
-            <a:off x="640080" y="3063240"/>
-            <a:ext cx="91440" cy="1234440"/>
-          </a:xfrm>
-          <a:prstGeom prst="rect">
-            <a:avLst/>
-          </a:prstGeom>
-          <a:solidFill>
-            <a:srgbClr val="0056FF"/>
-          </a:solidFill>
-          <a:ln>
-            <a:noFill/>
-          </a:ln>
-        </p:spPr>
-        <p:style>
-          <a:lnRef idx="1">
-            <a:schemeClr val="accent1"/>
-          </a:lnRef>
-          <a:fillRef idx="3">
-            <a:schemeClr val="accent1"/>
-          </a:fillRef>
-          <a:effectRef idx="2">
-            <a:schemeClr val="accent1"/>
-          </a:effectRef>
-          <a:fontRef idx="minor">
-            <a:schemeClr val="lt1"/>
-          </a:fontRef>
-        </p:style>
-        <p:txBody>
-          <a:bodyPr rtlCol="0" anchor="ctr"/>
-          <a:lstStyle/>
-          <a:p>
-            <a:pPr algn="ctr"/>
-            <a:endParaRPr/>
-          </a:p>
-        </p:txBody>
-      </p:sp>
-      <p:sp>
-        <p:nvSpPr>
-          <p:cNvPr id="31" name="TextBox 30"/>
-          <p:cNvSpPr txBox="1"/>
-          <p:nvPr/>
-        </p:nvSpPr>
-        <p:spPr>
-          <a:xfrm>
-            <a:off x="896112" y="3246120"/>
+            <a:off x="4599432" y="3246120"/>
             <a:ext cx="2971800" cy="228600"/>
           </a:xfrm>
           <a:prstGeom prst="rect">
@@ -3340,20 +3482,182 @@
             </a:pPr>
             <a:r>
               <a:rPr sz="1300" b="0"/>
-              <a:t>GitOps delivery</a:t>
-            </a:r>
-          </a:p>
-        </p:txBody>
-      </p:sp>
-      <p:sp>
-        <p:nvSpPr>
-          <p:cNvPr id="32" name="TextBox 31"/>
+              <a:t>Secure keys and secrets</a:t>
+            </a:r>
+          </a:p>
+        </p:txBody>
+      </p:sp>
+      <p:sp>
+        <p:nvSpPr>
+          <p:cNvPr id="36" name="TextBox 35"/>
           <p:cNvSpPr txBox="1"/>
           <p:nvPr/>
         </p:nvSpPr>
         <p:spPr>
           <a:xfrm>
-            <a:off x="896112" y="3593592"/>
+            <a:off x="4599432" y="3593592"/>
+            <a:ext cx="2971800" cy="530915"/>
+          </a:xfrm>
+          <a:prstGeom prst="rect">
+            <a:avLst/>
+          </a:prstGeom>
+          <a:noFill/>
+        </p:spPr>
+        <p:txBody>
+          <a:bodyPr wrap="square">
+            <a:spAutoFit/>
+          </a:bodyPr>
+          <a:lstStyle/>
+          <a:p>
+            <a:r>
+              <a:rPr sz="950" dirty="0"/>
+              <a:t>Vault protects database credentials, tokens, certificates, signing keys, </a:t>
+            </a:r>
+            <a:r>
+              <a:rPr sz="950" dirty="0" err="1"/>
+              <a:t>mTLS</a:t>
+            </a:r>
+            <a:r>
+              <a:rPr sz="950" dirty="0"/>
+              <a:t> trust material and approved solver license material where governed.</a:t>
+            </a:r>
+          </a:p>
+        </p:txBody>
+      </p:sp>
+      <p:sp>
+        <p:nvSpPr>
+          <p:cNvPr id="37" name="Rounded Rectangle 36"/>
+          <p:cNvSpPr/>
+          <p:nvPr/>
+        </p:nvSpPr>
+        <p:spPr>
+          <a:xfrm>
+            <a:off x="8046720" y="3063240"/>
+            <a:ext cx="3383280" cy="1234440"/>
+          </a:xfrm>
+          <a:prstGeom prst="roundRect">
+            <a:avLst/>
+          </a:prstGeom>
+          <a:solidFill>
+            <a:srgbClr val="FFFFFF"/>
+          </a:solidFill>
+          <a:ln>
+            <a:solidFill>
+              <a:srgbClr val="D2DCEB"/>
+            </a:solidFill>
+          </a:ln>
+        </p:spPr>
+        <p:style>
+          <a:lnRef idx="1">
+            <a:schemeClr val="accent1"/>
+          </a:lnRef>
+          <a:fillRef idx="3">
+            <a:schemeClr val="accent1"/>
+          </a:fillRef>
+          <a:effectRef idx="2">
+            <a:schemeClr val="accent1"/>
+          </a:effectRef>
+          <a:fontRef idx="minor">
+            <a:schemeClr val="lt1"/>
+          </a:fontRef>
+        </p:style>
+        <p:txBody>
+          <a:bodyPr rtlCol="0" anchor="ctr"/>
+          <a:lstStyle/>
+          <a:p>
+            <a:pPr algn="ctr"/>
+            <a:endParaRPr/>
+          </a:p>
+        </p:txBody>
+      </p:sp>
+      <p:sp>
+        <p:nvSpPr>
+          <p:cNvPr id="38" name="Rectangle 37"/>
+          <p:cNvSpPr/>
+          <p:nvPr/>
+        </p:nvSpPr>
+        <p:spPr>
+          <a:xfrm>
+            <a:off x="8046720" y="3063240"/>
+            <a:ext cx="91440" cy="1234440"/>
+          </a:xfrm>
+          <a:prstGeom prst="rect">
+            <a:avLst/>
+          </a:prstGeom>
+          <a:solidFill>
+            <a:srgbClr val="FF8B00"/>
+          </a:solidFill>
+          <a:ln>
+            <a:noFill/>
+          </a:ln>
+        </p:spPr>
+        <p:style>
+          <a:lnRef idx="1">
+            <a:schemeClr val="accent1"/>
+          </a:lnRef>
+          <a:fillRef idx="3">
+            <a:schemeClr val="accent1"/>
+          </a:fillRef>
+          <a:effectRef idx="2">
+            <a:schemeClr val="accent1"/>
+          </a:effectRef>
+          <a:fontRef idx="minor">
+            <a:schemeClr val="lt1"/>
+          </a:fontRef>
+        </p:style>
+        <p:txBody>
+          <a:bodyPr rtlCol="0" anchor="ctr"/>
+          <a:lstStyle/>
+          <a:p>
+            <a:pPr algn="ctr"/>
+            <a:endParaRPr/>
+          </a:p>
+        </p:txBody>
+      </p:sp>
+      <p:sp>
+        <p:nvSpPr>
+          <p:cNvPr id="39" name="TextBox 38"/>
+          <p:cNvSpPr txBox="1"/>
+          <p:nvPr/>
+        </p:nvSpPr>
+        <p:spPr>
+          <a:xfrm>
+            <a:off x="8302752" y="3246120"/>
+            <a:ext cx="2971800" cy="228600"/>
+          </a:xfrm>
+          <a:prstGeom prst="rect">
+            <a:avLst/>
+          </a:prstGeom>
+          <a:noFill/>
+        </p:spPr>
+        <p:txBody>
+          <a:bodyPr wrap="square">
+            <a:spAutoFit/>
+          </a:bodyPr>
+          <a:lstStyle/>
+          <a:p>
+            <a:pPr>
+              <a:lnSpc>
+                <a:spcPct val="90000"/>
+              </a:lnSpc>
+              <a:defRPr sz="1300" b="0"/>
+            </a:pPr>
+            <a:r>
+              <a:rPr sz="1300" b="0"/>
+              <a:t>Elastic operations</a:t>
+            </a:r>
+          </a:p>
+        </p:txBody>
+      </p:sp>
+      <p:sp>
+        <p:nvSpPr>
+          <p:cNvPr id="40" name="TextBox 39"/>
+          <p:cNvSpPr txBox="1"/>
+          <p:nvPr/>
+        </p:nvSpPr>
+        <p:spPr>
+          <a:xfrm>
+            <a:off x="8302752" y="3593592"/>
             <a:ext cx="2971800" cy="640080"/>
           </a:xfrm>
           <a:prstGeom prst="rect">
@@ -3374,331 +3678,7 @@
               <a:defRPr sz="950" b="0"/>
             </a:pPr>
             <a:r>
-              <a:rPr sz="950" b="0" dirty="0" err="1"/>
-              <a:t>GitOps</a:t>
-            </a:r>
-            <a:r>
               <a:rPr sz="950" b="0" dirty="0"/>
-              <a:t> keeps application and infrastructure desired state reviewable, versioned and repeatable before promotion.</a:t>
-            </a:r>
-          </a:p>
-        </p:txBody>
-      </p:sp>
-      <p:sp>
-        <p:nvSpPr>
-          <p:cNvPr id="33" name="Rounded Rectangle 32"/>
-          <p:cNvSpPr/>
-          <p:nvPr/>
-        </p:nvSpPr>
-        <p:spPr>
-          <a:xfrm>
-            <a:off x="4343400" y="3063240"/>
-            <a:ext cx="3383280" cy="1234440"/>
-          </a:xfrm>
-          <a:prstGeom prst="roundRect">
-            <a:avLst/>
-          </a:prstGeom>
-          <a:solidFill>
-            <a:srgbClr val="FFFFFF"/>
-          </a:solidFill>
-          <a:ln>
-            <a:solidFill>
-              <a:srgbClr val="D2DCEB"/>
-            </a:solidFill>
-          </a:ln>
-        </p:spPr>
-        <p:style>
-          <a:lnRef idx="1">
-            <a:schemeClr val="accent1"/>
-          </a:lnRef>
-          <a:fillRef idx="3">
-            <a:schemeClr val="accent1"/>
-          </a:fillRef>
-          <a:effectRef idx="2">
-            <a:schemeClr val="accent1"/>
-          </a:effectRef>
-          <a:fontRef idx="minor">
-            <a:schemeClr val="lt1"/>
-          </a:fontRef>
-        </p:style>
-        <p:txBody>
-          <a:bodyPr rtlCol="0" anchor="ctr"/>
-          <a:lstStyle/>
-          <a:p>
-            <a:pPr algn="ctr"/>
-            <a:endParaRPr/>
-          </a:p>
-        </p:txBody>
-      </p:sp>
-      <p:sp>
-        <p:nvSpPr>
-          <p:cNvPr id="34" name="Rectangle 33"/>
-          <p:cNvSpPr/>
-          <p:nvPr/>
-        </p:nvSpPr>
-        <p:spPr>
-          <a:xfrm>
-            <a:off x="4343400" y="3063240"/>
-            <a:ext cx="91440" cy="1234440"/>
-          </a:xfrm>
-          <a:prstGeom prst="rect">
-            <a:avLst/>
-          </a:prstGeom>
-          <a:solidFill>
-            <a:srgbClr val="7037FF"/>
-          </a:solidFill>
-          <a:ln>
-            <a:noFill/>
-          </a:ln>
-        </p:spPr>
-        <p:style>
-          <a:lnRef idx="1">
-            <a:schemeClr val="accent1"/>
-          </a:lnRef>
-          <a:fillRef idx="3">
-            <a:schemeClr val="accent1"/>
-          </a:fillRef>
-          <a:effectRef idx="2">
-            <a:schemeClr val="accent1"/>
-          </a:effectRef>
-          <a:fontRef idx="minor">
-            <a:schemeClr val="lt1"/>
-          </a:fontRef>
-        </p:style>
-        <p:txBody>
-          <a:bodyPr rtlCol="0" anchor="ctr"/>
-          <a:lstStyle/>
-          <a:p>
-            <a:pPr algn="ctr"/>
-            <a:endParaRPr/>
-          </a:p>
-        </p:txBody>
-      </p:sp>
-      <p:sp>
-        <p:nvSpPr>
-          <p:cNvPr id="35" name="TextBox 34"/>
-          <p:cNvSpPr txBox="1"/>
-          <p:nvPr/>
-        </p:nvSpPr>
-        <p:spPr>
-          <a:xfrm>
-            <a:off x="4599432" y="3246120"/>
-            <a:ext cx="2971800" cy="228600"/>
-          </a:xfrm>
-          <a:prstGeom prst="rect">
-            <a:avLst/>
-          </a:prstGeom>
-          <a:noFill/>
-        </p:spPr>
-        <p:txBody>
-          <a:bodyPr wrap="square">
-            <a:spAutoFit/>
-          </a:bodyPr>
-          <a:lstStyle/>
-          <a:p>
-            <a:pPr>
-              <a:lnSpc>
-                <a:spcPct val="90000"/>
-              </a:lnSpc>
-              <a:defRPr sz="1300" b="0"/>
-            </a:pPr>
-            <a:r>
-              <a:rPr sz="1300" b="0"/>
-              <a:t>Secure keys and secrets</a:t>
-            </a:r>
-          </a:p>
-        </p:txBody>
-      </p:sp>
-      <p:sp>
-        <p:nvSpPr>
-          <p:cNvPr id="36" name="TextBox 35"/>
-          <p:cNvSpPr txBox="1"/>
-          <p:nvPr/>
-        </p:nvSpPr>
-        <p:spPr>
-          <a:xfrm>
-            <a:off x="4599432" y="3593592"/>
-            <a:ext cx="2971800" cy="640080"/>
-          </a:xfrm>
-          <a:prstGeom prst="rect">
-            <a:avLst/>
-          </a:prstGeom>
-          <a:noFill/>
-        </p:spPr>
-        <p:txBody>
-          <a:bodyPr wrap="square">
-            <a:spAutoFit/>
-          </a:bodyPr>
-          <a:lstStyle/>
-          <a:p>
-            <a:pPr>
-              <a:lnSpc>
-                <a:spcPct val="90000"/>
-              </a:lnSpc>
-              <a:defRPr sz="950" b="0"/>
-            </a:pPr>
-            <a:r>
-              <a:rPr sz="950" b="0"/>
-              <a:t>Vault protects database credentials, tokens, certificates, signing keys, mTLS trust material and Gurobi licence material.</a:t>
-            </a:r>
-          </a:p>
-        </p:txBody>
-      </p:sp>
-      <p:sp>
-        <p:nvSpPr>
-          <p:cNvPr id="37" name="Rounded Rectangle 36"/>
-          <p:cNvSpPr/>
-          <p:nvPr/>
-        </p:nvSpPr>
-        <p:spPr>
-          <a:xfrm>
-            <a:off x="8046720" y="3063240"/>
-            <a:ext cx="3383280" cy="1234440"/>
-          </a:xfrm>
-          <a:prstGeom prst="roundRect">
-            <a:avLst/>
-          </a:prstGeom>
-          <a:solidFill>
-            <a:srgbClr val="FFFFFF"/>
-          </a:solidFill>
-          <a:ln>
-            <a:solidFill>
-              <a:srgbClr val="D2DCEB"/>
-            </a:solidFill>
-          </a:ln>
-        </p:spPr>
-        <p:style>
-          <a:lnRef idx="1">
-            <a:schemeClr val="accent1"/>
-          </a:lnRef>
-          <a:fillRef idx="3">
-            <a:schemeClr val="accent1"/>
-          </a:fillRef>
-          <a:effectRef idx="2">
-            <a:schemeClr val="accent1"/>
-          </a:effectRef>
-          <a:fontRef idx="minor">
-            <a:schemeClr val="lt1"/>
-          </a:fontRef>
-        </p:style>
-        <p:txBody>
-          <a:bodyPr rtlCol="0" anchor="ctr"/>
-          <a:lstStyle/>
-          <a:p>
-            <a:pPr algn="ctr"/>
-            <a:endParaRPr/>
-          </a:p>
-        </p:txBody>
-      </p:sp>
-      <p:sp>
-        <p:nvSpPr>
-          <p:cNvPr id="38" name="Rectangle 37"/>
-          <p:cNvSpPr/>
-          <p:nvPr/>
-        </p:nvSpPr>
-        <p:spPr>
-          <a:xfrm>
-            <a:off x="8046720" y="3063240"/>
-            <a:ext cx="91440" cy="1234440"/>
-          </a:xfrm>
-          <a:prstGeom prst="rect">
-            <a:avLst/>
-          </a:prstGeom>
-          <a:solidFill>
-            <a:srgbClr val="FF8B00"/>
-          </a:solidFill>
-          <a:ln>
-            <a:noFill/>
-          </a:ln>
-        </p:spPr>
-        <p:style>
-          <a:lnRef idx="1">
-            <a:schemeClr val="accent1"/>
-          </a:lnRef>
-          <a:fillRef idx="3">
-            <a:schemeClr val="accent1"/>
-          </a:fillRef>
-          <a:effectRef idx="2">
-            <a:schemeClr val="accent1"/>
-          </a:effectRef>
-          <a:fontRef idx="minor">
-            <a:schemeClr val="lt1"/>
-          </a:fontRef>
-        </p:style>
-        <p:txBody>
-          <a:bodyPr rtlCol="0" anchor="ctr"/>
-          <a:lstStyle/>
-          <a:p>
-            <a:pPr algn="ctr"/>
-            <a:endParaRPr/>
-          </a:p>
-        </p:txBody>
-      </p:sp>
-      <p:sp>
-        <p:nvSpPr>
-          <p:cNvPr id="39" name="TextBox 38"/>
-          <p:cNvSpPr txBox="1"/>
-          <p:nvPr/>
-        </p:nvSpPr>
-        <p:spPr>
-          <a:xfrm>
-            <a:off x="8302752" y="3246120"/>
-            <a:ext cx="2971800" cy="228600"/>
-          </a:xfrm>
-          <a:prstGeom prst="rect">
-            <a:avLst/>
-          </a:prstGeom>
-          <a:noFill/>
-        </p:spPr>
-        <p:txBody>
-          <a:bodyPr wrap="square">
-            <a:spAutoFit/>
-          </a:bodyPr>
-          <a:lstStyle/>
-          <a:p>
-            <a:pPr>
-              <a:lnSpc>
-                <a:spcPct val="90000"/>
-              </a:lnSpc>
-              <a:defRPr sz="1300" b="0"/>
-            </a:pPr>
-            <a:r>
-              <a:rPr sz="1300" b="0"/>
-              <a:t>Elastic operations</a:t>
-            </a:r>
-          </a:p>
-        </p:txBody>
-      </p:sp>
-      <p:sp>
-        <p:nvSpPr>
-          <p:cNvPr id="40" name="TextBox 39"/>
-          <p:cNvSpPr txBox="1"/>
-          <p:nvPr/>
-        </p:nvSpPr>
-        <p:spPr>
-          <a:xfrm>
-            <a:off x="8302752" y="3593592"/>
-            <a:ext cx="2971800" cy="640080"/>
-          </a:xfrm>
-          <a:prstGeom prst="rect">
-            <a:avLst/>
-          </a:prstGeom>
-          <a:noFill/>
-        </p:spPr>
-        <p:txBody>
-          <a:bodyPr wrap="square">
-            <a:spAutoFit/>
-          </a:bodyPr>
-          <a:lstStyle/>
-          <a:p>
-            <a:pPr>
-              <a:lnSpc>
-                <a:spcPct val="90000"/>
-              </a:lnSpc>
-              <a:defRPr sz="950" b="0"/>
-            </a:pPr>
-            <a:r>
-              <a:rPr sz="950" b="0"/>
               <a:t>Kubernetes telemetry and instrumentation support scale out and scale in based on demand, backed by monitoring, logging and dashboards.</a:t>
             </a:r>
           </a:p>
@@ -3806,7 +3786,7 @@
         <p:spPr>
           <a:xfrm>
             <a:off x="2084831" y="5010912"/>
-            <a:ext cx="9006840" cy="529569"/>
+            <a:ext cx="9006840" cy="507831"/>
           </a:xfrm>
           <a:prstGeom prst="rect">
             <a:avLst/>
@@ -3819,32 +3799,24 @@
           </a:bodyPr>
           <a:lstStyle/>
           <a:p>
-            <a:pPr>
-              <a:lnSpc>
-                <a:spcPct val="90000"/>
-              </a:lnSpc>
-              <a:defRPr sz="1050" b="0"/>
-            </a:pPr>
-            <a:r>
-              <a:rPr sz="1050" b="0" dirty="0"/>
+            <a:r>
+              <a:rPr sz="900" dirty="0"/>
               <a:t>Infrastructure is re-created from code rather than hand-managed. GitHub Copilot, Claude Code and Codex can assist delivery, but changes still flow through pull requests, quality gates, security scanning, </a:t>
             </a:r>
             <a:r>
-              <a:rPr sz="1050" b="0" dirty="0" err="1"/>
+              <a:rPr sz="900" dirty="0" err="1"/>
               <a:t>GitOps</a:t>
             </a:r>
             <a:r>
-              <a:rPr sz="1050" b="0" dirty="0"/>
+              <a:rPr sz="900" dirty="0"/>
               <a:t> promotion and controlled release governance.</a:t>
             </a:r>
-            <a:br>
-              <a:rPr lang="en-AU" sz="1050" b="0" dirty="0"/>
-            </a:br>
-            <a:r>
-              <a:rPr lang="en-AU" sz="1050" b="0" dirty="0"/>
-              <a:t>CI/CD will run consistently to make sure nothing unexpected broken at day-to-day operations.</a:t>
-            </a:r>
-            <a:endParaRPr sz="1050" b="0" dirty="0"/>
+          </a:p>
+          <a:p>
+            <a:r>
+              <a:rPr sz="900" dirty="0"/>
+              <a:t>CI/CD runs consistently to reduce unexpected breakage in day-to-day operations.</a:t>
+            </a:r>
           </a:p>
         </p:txBody>
       </p:sp>
@@ -7089,7 +7061,7 @@
           <a:p>
             <a:pPr algn="l"/>
             <a:r>
-              <a:rPr sz="950" b="0">
+              <a:rPr sz="950" b="0" dirty="0">
                 <a:solidFill>
                   <a:srgbClr val="E9EDF5"/>
                 </a:solidFill>
@@ -7171,7 +7143,7 @@
           <a:p>
             <a:pPr algn="l"/>
             <a:r>
-              <a:rPr sz="950" b="0">
+              <a:rPr sz="950" b="0" dirty="0">
                 <a:solidFill>
                   <a:srgbClr val="E9EDF5"/>
                 </a:solidFill>
@@ -7197,7 +7169,7 @@
         <p:spPr>
           <a:xfrm>
             <a:off x="7386244" y="4184377"/>
-            <a:ext cx="3246120" cy="228600"/>
+            <a:ext cx="3246120" cy="603242"/>
           </a:xfrm>
           <a:prstGeom prst="rect">
             <a:avLst/>
@@ -7210,15 +7182,51 @@
           </a:bodyPr>
           <a:lstStyle/>
           <a:p>
-            <a:pPr algn="l"/>
-            <a:r>
-              <a:rPr sz="950" b="0">
-                <a:solidFill>
-                  <a:srgbClr val="E9EDF5"/>
-                </a:solidFill>
-                <a:latin typeface="Arial"/>
+            <a:r>
+              <a:rPr sz="950" dirty="0">
+                <a:solidFill>
+                  <a:schemeClr val="bg1"/>
+                </a:solidFill>
               </a:rPr>
               <a:t>• No cache or fallback can fake source-of-truth state</a:t>
+            </a:r>
+            <a:endParaRPr lang="en-AU" sz="950" dirty="0">
+              <a:solidFill>
+                <a:schemeClr val="bg1"/>
+              </a:solidFill>
+            </a:endParaRPr>
+          </a:p>
+          <a:p>
+            <a:endParaRPr sz="950" dirty="0">
+              <a:solidFill>
+                <a:schemeClr val="bg1"/>
+              </a:solidFill>
+            </a:endParaRPr>
+          </a:p>
+          <a:p>
+            <a:r>
+              <a:rPr sz="950" dirty="0">
+                <a:solidFill>
+                  <a:schemeClr val="bg1"/>
+                </a:solidFill>
+              </a:rPr>
+              <a:t>• Retrial creates a new governed runtime resource from FAILED with </a:t>
+            </a:r>
+            <a:r>
+              <a:rPr sz="950" dirty="0" err="1">
+                <a:solidFill>
+                  <a:schemeClr val="bg1"/>
+                </a:solidFill>
+              </a:rPr>
+              <a:t>creationContext.reason</a:t>
+            </a:r>
+            <a:r>
+              <a:rPr sz="950" dirty="0">
+                <a:solidFill>
+                  <a:schemeClr val="bg1"/>
+                </a:solidFill>
+              </a:rPr>
+              <a:t> = RETRIAL</a:t>
             </a:r>
           </a:p>
         </p:txBody>
@@ -13388,16 +13396,7 @@
           <a:lstStyle/>
           <a:p>
             <a:r>
-              <a:rPr dirty="0"/>
-              <a:t>Key point: Controller MS is the runtime source of truth; it validates requests against ACTIVE Definition contracts. Worker MS emits </a:t>
-            </a:r>
-            <a:r>
-              <a:rPr lang="en-AU" dirty="0"/>
-              <a:t>results, state of that model execution, Definition MS gives us the source of truth reference of capability model</a:t>
-            </a:r>
-            <a:r>
-              <a:rPr dirty="0"/>
-              <a:t>.</a:t>
+              <a:t>Key point: Definition MS governs capability contracts; Controller MS owns runtime truth; Worker MS executes and emits outcome facts only.</a:t>
             </a:r>
           </a:p>
         </p:txBody>
@@ -16619,44 +16618,18 @@
         </p:spPr>
         <p:txBody>
           <a:bodyPr wrap="square" lIns="0" tIns="0" rIns="0" bIns="0" rtlCol="0" anchor="ctr">
-            <a:normAutofit/>
+            <a:normAutofit fontScale="77500" lnSpcReduction="20000"/>
           </a:bodyPr>
           <a:lstStyle/>
           <a:p>
-            <a:pPr marL="0" indent="0" algn="ctr">
-              <a:buNone/>
-            </a:pPr>
-            <a:r>
-              <a:rPr lang="en-US" sz="980" dirty="0">
-                <a:solidFill>
-                  <a:srgbClr val="5F6B7A"/>
-                </a:solidFill>
-              </a:rPr>
+            <a:r>
               <a:t>mTLS + service</a:t>
             </a:r>
-            <a:endParaRPr lang="en-US" sz="980" dirty="0"/>
-          </a:p>
-          <a:p>
-            <a:pPr marL="0" indent="0" algn="ctr">
-              <a:buNone/>
-            </a:pPr>
-            <a:r>
-              <a:rPr lang="en-US" sz="980" dirty="0" err="1">
-                <a:solidFill>
-                  <a:srgbClr val="5F6B7A"/>
-                </a:solidFill>
-              </a:rPr>
-              <a:t>Identity+user</a:t>
-            </a:r>
-            <a:r>
-              <a:rPr lang="en-US" sz="980" dirty="0">
-                <a:solidFill>
-                  <a:srgbClr val="5F6B7A"/>
-                </a:solidFill>
-              </a:rPr>
-              <a:t> context</a:t>
-            </a:r>
-            <a:endParaRPr lang="en-US" sz="980" dirty="0"/>
+          </a:p>
+          <a:p>
+            <a:r>
+              <a:t>identity</a:t>
+            </a:r>
           </a:p>
         </p:txBody>
       </p:sp>
@@ -17263,27 +17236,11 @@
           <a:p>
             <a:r>
               <a:rPr dirty="0"/>
-              <a:t>PostgreSQL is authoritative</a:t>
+              <a:t>PostgreSQL is the authoritative datastore. Redis cache provides safe read acceleration only and never replaces lifecycle, audit, validation or source-of-truth state</a:t>
             </a:r>
             <a:r>
               <a:rPr lang="en-AU" dirty="0"/>
-              <a:t> datastore</a:t>
-            </a:r>
-            <a:r>
-              <a:rPr dirty="0"/>
-              <a:t>. </a:t>
-            </a:r>
-            <a:r>
-              <a:rPr lang="en-AU" dirty="0"/>
-              <a:t>Redis </a:t>
-            </a:r>
-            <a:r>
-              <a:rPr dirty="0"/>
-              <a:t>Cache is safe read acceleration only and never replaces lifecycle, audit or validation</a:t>
-            </a:r>
-            <a:r>
-              <a:rPr lang="en-AU" dirty="0"/>
-              <a:t>, or treated as source of truth.</a:t>
+              <a:t>, these are access controlled and governed data sources.</a:t>
             </a:r>
             <a:endParaRPr dirty="0"/>
           </a:p>
@@ -17918,8 +17875,8 @@
         </p:nvSpPr>
         <p:spPr>
           <a:xfrm>
-            <a:off x="8092440" y="4398264"/>
-            <a:ext cx="3154680" cy="201168"/>
+            <a:off x="8092440" y="4342977"/>
+            <a:ext cx="3154680" cy="429768"/>
           </a:xfrm>
           <a:prstGeom prst="rect">
             <a:avLst/>
@@ -17929,38 +17886,14 @@
         </p:spPr>
         <p:txBody>
           <a:bodyPr wrap="square" lIns="0" tIns="0" rIns="0" bIns="0" rtlCol="0" anchor="ctr">
-            <a:normAutofit fontScale="70000" lnSpcReduction="20000"/>
+            <a:normAutofit fontScale="47500" lnSpcReduction="20000"/>
           </a:bodyPr>
           <a:lstStyle/>
           <a:p>
-            <a:pPr marL="0" indent="0">
-              <a:buNone/>
-            </a:pPr>
-            <a:r>
-              <a:rPr lang="en-US" sz="880" dirty="0">
-                <a:solidFill>
-                  <a:srgbClr val="5F6B7A"/>
-                </a:solidFill>
-              </a:rPr>
-              <a:t>Internal optimisation result reuse must still preserve runtime identity, audit and persistence, cache will be only enabled when it is in safe to cache state (</a:t>
-            </a:r>
-            <a:r>
-              <a:rPr lang="en-US" sz="880" dirty="0" err="1">
-                <a:solidFill>
-                  <a:srgbClr val="5F6B7A"/>
-                </a:solidFill>
-              </a:rPr>
-              <a:t>ex:terminal</a:t>
-            </a:r>
-            <a:r>
-              <a:rPr lang="en-US" sz="880" dirty="0">
-                <a:solidFill>
-                  <a:srgbClr val="5F6B7A"/>
-                </a:solidFill>
-              </a:rPr>
-              <a:t>)</a:t>
-            </a:r>
-            <a:endParaRPr lang="en-US" sz="880" dirty="0"/>
+            <a:r>
+              <a:rPr lang="en-AU" dirty="0"/>
+              <a:t>Internal optimisation result reuse must still preserve runtime identity, audit and persistence. Cache is enabled only for safe-to-cache states, such as terminal outcomes.</a:t>
+            </a:r>
           </a:p>
         </p:txBody>
       </p:sp>
@@ -18154,8 +18087,8 @@
         </p:nvSpPr>
         <p:spPr>
           <a:xfrm>
-            <a:off x="8092440" y="5148072"/>
-            <a:ext cx="3154680" cy="347472"/>
+            <a:off x="8092440" y="5038343"/>
+            <a:ext cx="3154680" cy="457201"/>
           </a:xfrm>
           <a:prstGeom prst="rect">
             <a:avLst/>
@@ -18165,22 +18098,14 @@
         </p:spPr>
         <p:txBody>
           <a:bodyPr wrap="square" lIns="0" tIns="0" rIns="0" bIns="0" rtlCol="0" anchor="ctr">
-            <a:normAutofit fontScale="92500" lnSpcReduction="10000"/>
+            <a:normAutofit fontScale="55000" lnSpcReduction="20000"/>
           </a:bodyPr>
           <a:lstStyle/>
           <a:p>
-            <a:pPr marL="0" indent="0">
-              <a:buNone/>
-            </a:pPr>
-            <a:r>
-              <a:rPr lang="en-US" sz="880" dirty="0">
-                <a:solidFill>
-                  <a:srgbClr val="5F6B7A"/>
-                </a:solidFill>
-              </a:rPr>
-              <a:t>cache will not treat as source of truth,   it will not used for command acceptance, validation, lifecycle, result, cancellation, retrial, security or audit. </a:t>
-            </a:r>
-            <a:endParaRPr lang="en-US" sz="880" dirty="0"/>
+            <a:r>
+              <a:rPr dirty="0"/>
+              <a:t>Cache is never treated as source of truth and is never used for command acceptance, validation, lifecycle, result, cancellation, retrial, security or audit.</a:t>
+            </a:r>
           </a:p>
         </p:txBody>
       </p:sp>
@@ -18611,17 +18536,12 @@
         </p:spPr>
         <p:txBody>
           <a:bodyPr wrap="square" lIns="0" tIns="0" rIns="0" bIns="0" rtlCol="0" anchor="ctr">
-            <a:normAutofit/>
+            <a:normAutofit fontScale="85000" lnSpcReduction="10000"/>
           </a:bodyPr>
           <a:lstStyle/>
           <a:p>
             <a:r>
-              <a:rPr sz="1400">
-                <a:solidFill>
-                  <a:srgbClr val="282828"/>
-                </a:solidFill>
-              </a:rPr>
-              <a:t>The OEX experience layer is governed by ASG approval and Microsoft Entra ID; backend services still enforce their own rules.</a:t>
+              <a:t>The OEX experience layer is governed by AGS approval and Microsoft Entra ID; backend services still enforce their own rules.</a:t>
             </a:r>
           </a:p>
         </p:txBody>
@@ -18985,18 +18905,9 @@
           </a:bodyPr>
           <a:lstStyle/>
           <a:p>
-            <a:pPr marL="0" indent="0" algn="ctr">
-              <a:buNone/>
-            </a:pPr>
-            <a:r>
-              <a:rPr lang="en-US" sz="1220" b="1" dirty="0">
-                <a:solidFill>
-                  <a:srgbClr val="19B66A"/>
-                </a:solidFill>
-              </a:rPr>
-              <a:t>ASG</a:t>
-            </a:r>
-            <a:endParaRPr lang="en-US" sz="1220" dirty="0"/>
+            <a:r>
+              <a:t>AGS</a:t>
+            </a:r>
           </a:p>
         </p:txBody>
       </p:sp>
@@ -20603,51 +20514,8 @@
           </a:bodyPr>
           <a:lstStyle/>
           <a:p>
-            <a:pPr algn="l"/>
-            <a:r>
-              <a:rPr sz="1200" b="0" dirty="0">
-                <a:solidFill>
-                  <a:srgbClr val="677384"/>
-                </a:solidFill>
-                <a:latin typeface="Arial"/>
-              </a:rPr>
-              <a:t>Worker events execute </a:t>
-            </a:r>
-            <a:r>
-              <a:rPr lang="en-AU" sz="1200" b="0" dirty="0">
-                <a:solidFill>
-                  <a:srgbClr val="677384"/>
-                </a:solidFill>
-                <a:latin typeface="Arial"/>
-              </a:rPr>
-              <a:t>, cancel </a:t>
-            </a:r>
-            <a:r>
-              <a:rPr sz="1200" b="0" dirty="0">
-                <a:solidFill>
-                  <a:srgbClr val="677384"/>
-                </a:solidFill>
-                <a:latin typeface="Arial"/>
-              </a:rPr>
-              <a:t>work. Controller projection remains the source of truth. Webhooks only notify subscribers</a:t>
-            </a:r>
-            <a:r>
-              <a:rPr lang="en-AU" sz="1200" b="0" dirty="0">
-                <a:solidFill>
-                  <a:srgbClr val="677384"/>
-                </a:solidFill>
-                <a:latin typeface="Arial"/>
-              </a:rPr>
-              <a:t> for status changes</a:t>
-            </a:r>
-            <a:r>
-              <a:rPr sz="1200" b="0" dirty="0">
-                <a:solidFill>
-                  <a:srgbClr val="677384"/>
-                </a:solidFill>
-                <a:latin typeface="Arial"/>
-              </a:rPr>
-              <a:t>.</a:t>
+            <a:r>
+              <a:t>Worker events execute or cancel work. Controller projection remains the source of truth. Webhooks notify subscribers of status changes only.</a:t>
             </a:r>
           </a:p>
         </p:txBody>
@@ -21523,13 +21391,31 @@
           <a:p>
             <a:pPr algn="ctr"/>
             <a:r>
-              <a:rPr sz="1220" b="1">
+              <a:rPr sz="1220" b="1" dirty="0">
                 <a:solidFill>
                   <a:srgbClr val="14233E"/>
                 </a:solidFill>
                 <a:latin typeface="Arial"/>
               </a:rPr>
-              <a:t>Source of truth: Controller persists lifecycle and result. GET /optimisation/{id} remains authoritative.</a:t>
+              <a:t>Source of truth: Controller persists lifecycle and result. GET /</a:t>
+            </a:r>
+            <a:r>
+              <a:rPr sz="1220" b="1" dirty="0" err="1">
+                <a:solidFill>
+                  <a:srgbClr val="14233E"/>
+                </a:solidFill>
+                <a:latin typeface="Arial"/>
+              </a:rPr>
+              <a:t>optimisation</a:t>
+            </a:r>
+            <a:r>
+              <a:rPr sz="1220" b="1" dirty="0">
+                <a:solidFill>
+                  <a:srgbClr val="14233E"/>
+                </a:solidFill>
+                <a:latin typeface="Arial"/>
+              </a:rPr>
+              <a:t>/{id} remains authoritative.</a:t>
             </a:r>
           </a:p>
         </p:txBody>
@@ -21590,7 +21476,7 @@
         <p:spPr>
           <a:xfrm>
             <a:off x="689541" y="5075748"/>
-            <a:ext cx="4800600" cy="960120"/>
+            <a:ext cx="4800600" cy="1115568"/>
           </a:xfrm>
           <a:prstGeom prst="roundRect">
             <a:avLst/>
@@ -21765,7 +21651,7 @@
         <p:spPr>
           <a:xfrm>
             <a:off x="5700453" y="5075748"/>
-            <a:ext cx="4983480" cy="960120"/>
+            <a:ext cx="4983480" cy="1115568"/>
           </a:xfrm>
           <a:prstGeom prst="roundRect">
             <a:avLst/>
@@ -21857,7 +21743,7 @@
         </p:nvSpPr>
         <p:spPr>
           <a:xfrm>
-            <a:off x="5837613" y="5395371"/>
+            <a:off x="5837613" y="5352839"/>
             <a:ext cx="4736592" cy="182880"/>
           </a:xfrm>
           <a:prstGeom prst="rect">
@@ -21898,8 +21784,8 @@
         </p:nvSpPr>
         <p:spPr>
           <a:xfrm>
-            <a:off x="5837613" y="5583654"/>
-            <a:ext cx="4736592" cy="590931"/>
+            <a:off x="6390162" y="5537443"/>
+            <a:ext cx="3854223" cy="590931"/>
           </a:xfrm>
           <a:prstGeom prst="rect">
             <a:avLst/>
@@ -21912,49 +21798,23 @@
           </a:bodyPr>
           <a:lstStyle/>
           <a:p>
-            <a:pPr algn="ctr"/>
-            <a:r>
-              <a:rPr sz="900" b="0" dirty="0">
-                <a:solidFill>
-                  <a:srgbClr val="242E42"/>
-                </a:solidFill>
-                <a:latin typeface="Arial"/>
-              </a:rPr>
+            <a:r>
+              <a:rPr sz="900" dirty="0"/>
               <a:t>Cancellation path: CANCELLING → CANCELLED or CANCELLATIONFAILED</a:t>
             </a:r>
-            <a:br>
-              <a:rPr lang="en-AU" sz="900" b="0" dirty="0">
-                <a:solidFill>
-                  <a:srgbClr val="242E42"/>
-                </a:solidFill>
-                <a:latin typeface="Arial"/>
-              </a:rPr>
-            </a:br>
-            <a:r>
-              <a:rPr lang="en-AU" sz="900" b="0" dirty="0">
-                <a:solidFill>
-                  <a:srgbClr val="242E42"/>
-                </a:solidFill>
-                <a:latin typeface="Arial"/>
-              </a:rPr>
-              <a:t>terminals:</a:t>
-            </a:r>
-          </a:p>
-          <a:p>
-            <a:pPr algn="ctr"/>
-            <a:r>
-              <a:rPr lang="en-AU" sz="900" dirty="0"/>
-              <a:t>COMPLETED, INFEASIBLE, FAILED, CANCELLED or CANCELLATIONFAILED</a:t>
-            </a:r>
-          </a:p>
-          <a:p>
-            <a:pPr algn="ctr"/>
-            <a:endParaRPr sz="900" b="0" dirty="0">
-              <a:solidFill>
-                <a:srgbClr val="242E42"/>
-              </a:solidFill>
-              <a:latin typeface="Arial"/>
-            </a:endParaRPr>
+            <a:endParaRPr lang="en-AU" sz="900" dirty="0"/>
+          </a:p>
+          <a:p>
+            <a:r>
+              <a:rPr sz="900" dirty="0"/>
+              <a:t>Terminal outcomes: COMPLETED, INFEASIBLE, FAILED or CANCELLED.</a:t>
+            </a:r>
+          </a:p>
+          <a:p>
+            <a:r>
+              <a:rPr sz="900" dirty="0"/>
+              <a:t>CANCELLATIONFAILED is non-terminal and may later resolve to COMPLETED, INFEASIBLE or FAILED.</a:t>
+            </a:r>
           </a:p>
         </p:txBody>
       </p:sp>
@@ -22257,22 +22117,13 @@
         </p:spPr>
         <p:txBody>
           <a:bodyPr wrap="square" lIns="0" tIns="0" rIns="0" bIns="0" rtlCol="0" anchor="ctr">
-            <a:normAutofit lnSpcReduction="10000"/>
+            <a:normAutofit fontScale="85000" lnSpcReduction="20000"/>
           </a:bodyPr>
           <a:lstStyle/>
           <a:p>
-            <a:pPr marL="0" indent="0">
-              <a:buNone/>
-            </a:pPr>
-            <a:r>
-              <a:rPr lang="en-US" sz="1400" dirty="0">
-                <a:solidFill>
-                  <a:srgbClr val="5F6B7A"/>
-                </a:solidFill>
-              </a:rPr>
-              <a:t>Runtime state and outbox are durable before execution continues, Inbox let us replay topics without fear of duplication.</a:t>
-            </a:r>
-            <a:endParaRPr lang="en-US" sz="1400" dirty="0"/>
+            <a:r>
+              <a:t>Runtime state and outbox are durable before execution continues; the inbox enables safe duplicate handling and controlled replay.</a:t>
+            </a:r>
           </a:p>
         </p:txBody>
       </p:sp>
@@ -22674,22 +22525,13 @@
         </p:spPr>
         <p:txBody>
           <a:bodyPr wrap="square" lIns="0" tIns="0" rIns="0" bIns="0" rtlCol="0" anchor="ctr">
-            <a:normAutofit/>
+            <a:normAutofit fontScale="62500" lnSpcReduction="20000"/>
           </a:bodyPr>
           <a:lstStyle/>
           <a:p>
-            <a:pPr marL="0" indent="0">
-              <a:buNone/>
-            </a:pPr>
-            <a:r>
-              <a:rPr lang="en-US" sz="1400" dirty="0">
-                <a:solidFill>
-                  <a:srgbClr val="5F6B7A"/>
-                </a:solidFill>
-              </a:rPr>
-              <a:t>Circuit breakers and Caches enable  us to fail fast gracefully. </a:t>
-            </a:r>
-            <a:endParaRPr lang="en-US" sz="1400" dirty="0"/>
+            <a:r>
+              <a:t>Circuit breakers fail fast when no safe fallback exists; cache is used only when source-of-truth semantics remain safe.</a:t>
+            </a:r>
           </a:p>
         </p:txBody>
       </p:sp>
